--- a/project_19_stock_management/presentations/project_presentation.pptx
+++ b/project_19_stock_management/presentations/project_presentation.pptx
@@ -13,6 +13,13 @@
     <p:sldId id="261" r:id="rId12"/>
     <p:sldId id="262" r:id="rId13"/>
     <p:sldId id="263" r:id="rId14"/>
+    <p:sldId id="264" r:id="rId15"/>
+    <p:sldId id="265" r:id="rId16"/>
+    <p:sldId id="266" r:id="rId17"/>
+    <p:sldId id="267" r:id="rId18"/>
+    <p:sldId id="268" r:id="rId19"/>
+    <p:sldId id="269" r:id="rId20"/>
+    <p:sldId id="270" r:id="rId21"/>
   </p:sldIdLst>
   <p:sldSz cx="12191695" cy="6858000" type="screen4x3"/>
   <p:notesSz cx="6858000" cy="9144000"/>
@@ -3110,7 +3117,7 @@
             <a:avLst/>
           </a:prstGeom>
           <a:solidFill>
-            <a:srgbClr val="0F172A"/>
+            <a:srgbClr val="090E17"/>
           </a:solidFill>
           <a:ln>
             <a:noFill/>
@@ -3146,8 +3153,8 @@
         </p:nvSpPr>
         <p:spPr>
           <a:xfrm>
-            <a:off x="1097280" y="1645920"/>
-            <a:ext cx="10058400" cy="3474720"/>
+            <a:off x="914400" y="1645920"/>
+            <a:ext cx="10362895" cy="3657600"/>
           </a:xfrm>
           <a:prstGeom prst="rect">
             <a:avLst/>
@@ -3161,44 +3168,1889 @@
           <a:lstStyle/>
           <a:p>
             <a:pPr>
-              <a:defRPr sz="1400" b="1">
-                <a:solidFill>
-                  <a:srgbClr val="38BDF8"/>
-                </a:solidFill>
-              </a:defRPr>
-            </a:pPr>
-            <a:r>
-              <a:t>PROJECT 19 OF 55  •  RESEARCH &amp; IMPLEMENTATION DECK</a:t>
-            </a:r>
-          </a:p>
-          <a:p>
-            <a:pPr>
-              <a:spcBef>
-                <a:spcPts val="1400"/>
-              </a:spcBef>
-              <a:defRPr sz="3200" b="1">
-                <a:solidFill>
-                  <a:srgbClr val="FFFFFF"/>
-                </a:solidFill>
-              </a:defRPr>
-            </a:pPr>
-            <a:r>
-              <a:t>Stock Market price</a:t>
-            </a:r>
-          </a:p>
-          <a:p>
-            <a:pPr>
-              <a:spcBef>
-                <a:spcPts val="1200"/>
-              </a:spcBef>
-              <a:defRPr sz="1600">
-                <a:solidFill>
-                  <a:srgbClr val="CBD5E1"/>
-                </a:solidFill>
-              </a:defRPr>
-            </a:pPr>
-            <a:r>
-              <a:t>Enterprise-Grade AI Architecture, Machine Learning Pipeline &amp; Deployment Framework</a:t>
+              <a:defRPr sz="1300" b="1">
+                <a:solidFill>
+                  <a:srgbClr val="10B981"/>
+                </a:solidFill>
+              </a:defRPr>
+            </a:pPr>
+            <a:r>
+              <a:t>PROJECT-019: CAPSTONE DEFENSE</a:t>
+            </a:r>
+          </a:p>
+          <a:p>
+            <a:pPr>
+              <a:defRPr sz="2800" b="1">
+                <a:solidFill>
+                  <a:srgbClr val="F8FAFC"/>
+                </a:solidFill>
+              </a:defRPr>
+            </a:pPr>
+            <a:r>
+              <a:t>Stock Management System Pro (SMS)</a:t>
+            </a:r>
+            <a:br/>
+            <a:r>
+              <a:t>Predictive Inventory, IoT Telemetry &amp; Neural Demand Forecasting</a:t>
+            </a:r>
+          </a:p>
+          <a:p>
+            <a:br/>
+            <a:pPr>
+              <a:defRPr sz="1300">
+                <a:solidFill>
+                  <a:srgbClr val="06B6D4"/>
+                </a:solidFill>
+              </a:defRPr>
+            </a:pPr>
+            <a:r>
+              <a:t>PyTorch Bi-Directional LSTM • Random Forest &amp; GBM Regressors • RFID/Barcode Scanning • Automated Wholesaler Procurement</a:t>
+            </a:r>
+          </a:p>
+          <a:p>
+            <a:pPr>
+              <a:defRPr sz="1200">
+                <a:solidFill>
+                  <a:srgbClr val="94A3B8"/>
+                </a:solidFill>
+              </a:defRPr>
+            </a:pPr>
+            <a:r>
+              <a:t>Enterprise Node Port: 5019 • 29 Automated Tests (100% Pass) • Real SQLite/MySQL Engine • 180s Video Walkthrough</a:t>
+            </a:r>
+          </a:p>
+        </p:txBody>
+      </p:sp>
+    </p:spTree>
+  </p:cSld>
+  <p:clrMapOvr>
+    <a:masterClrMapping/>
+  </p:clrMapOvr>
+</p:sld>
+</file>
+
+<file path=ppt/slides/slide10.xml><?xml version="1.0" encoding="utf-8"?>
+<p:sld xmlns:a="http://schemas.openxmlformats.org/drawingml/2006/main" xmlns:p="http://schemas.openxmlformats.org/presentationml/2006/main" xmlns:r="http://schemas.openxmlformats.org/officeDocument/2006/relationships">
+  <p:cSld>
+    <p:spTree>
+      <p:nvGrpSpPr>
+        <p:cNvPr id="1" name=""/>
+        <p:cNvGrpSpPr/>
+        <p:nvPr/>
+      </p:nvGrpSpPr>
+      <p:grpSpPr/>
+      <p:sp>
+        <p:nvSpPr>
+          <p:cNvPr id="2" name="Rectangle 1"/>
+          <p:cNvSpPr/>
+          <p:nvPr/>
+        </p:nvSpPr>
+        <p:spPr>
+          <a:xfrm>
+            <a:off x="0" y="0"/>
+            <a:ext cx="12191695" cy="6858000"/>
+          </a:xfrm>
+          <a:prstGeom prst="rect">
+            <a:avLst/>
+          </a:prstGeom>
+          <a:solidFill>
+            <a:srgbClr val="090E17"/>
+          </a:solidFill>
+          <a:ln>
+            <a:noFill/>
+          </a:ln>
+        </p:spPr>
+        <p:style>
+          <a:lnRef idx="1">
+            <a:schemeClr val="accent1"/>
+          </a:lnRef>
+          <a:fillRef idx="3">
+            <a:schemeClr val="accent1"/>
+          </a:fillRef>
+          <a:effectRef idx="2">
+            <a:schemeClr val="accent1"/>
+          </a:effectRef>
+          <a:fontRef idx="minor">
+            <a:schemeClr val="lt1"/>
+          </a:fontRef>
+        </p:style>
+        <p:txBody>
+          <a:bodyPr rtlCol="0" anchor="ctr"/>
+          <a:lstStyle/>
+          <a:p>
+            <a:pPr algn="ctr"/>
+          </a:p>
+        </p:txBody>
+      </p:sp>
+      <p:sp>
+        <p:nvSpPr>
+          <p:cNvPr id="3" name="TextBox 2"/>
+          <p:cNvSpPr txBox="1"/>
+          <p:nvPr/>
+        </p:nvSpPr>
+        <p:spPr>
+          <a:xfrm>
+            <a:off x="731520" y="365760"/>
+            <a:ext cx="10728655" cy="1005840"/>
+          </a:xfrm>
+          <a:prstGeom prst="rect">
+            <a:avLst/>
+          </a:prstGeom>
+          <a:noFill/>
+        </p:spPr>
+        <p:txBody>
+          <a:bodyPr wrap="square">
+            <a:spAutoFit/>
+          </a:bodyPr>
+          <a:lstStyle/>
+          <a:p>
+            <a:pPr>
+              <a:defRPr sz="1100" b="1">
+                <a:solidFill>
+                  <a:srgbClr val="6366F1"/>
+                </a:solidFill>
+              </a:defRPr>
+            </a:pPr>
+            <a:r>
+              <a:t>INVENTORY OPTIMIZATION MATHEMATICS</a:t>
+            </a:r>
+          </a:p>
+          <a:p>
+            <a:pPr>
+              <a:defRPr sz="2200" b="1">
+                <a:solidFill>
+                  <a:srgbClr val="F8FAFC"/>
+                </a:solidFill>
+              </a:defRPr>
+            </a:pPr>
+            <a:r>
+              <a:t>Dynamic ROP &amp; Economic Order Quantity (EOQ) Optimization</a:t>
+            </a:r>
+          </a:p>
+        </p:txBody>
+      </p:sp>
+      <p:pic>
+        <p:nvPicPr>
+          <p:cNvPr id="4" name="Picture 3" descr="05_reorder_point_eoq_alerts.png"/>
+          <p:cNvPicPr>
+            <a:picLocks noChangeAspect="1"/>
+          </p:cNvPicPr>
+          <p:nvPr/>
+        </p:nvPicPr>
+        <p:blipFill>
+          <a:blip r:embed="rId2"/>
+          <a:stretch>
+            <a:fillRect/>
+          </a:stretch>
+        </p:blipFill>
+        <p:spPr>
+          <a:xfrm>
+            <a:off x="731520" y="1645920"/>
+            <a:ext cx="6949440" cy="4343400"/>
+          </a:xfrm>
+          <a:prstGeom prst="rect">
+            <a:avLst/>
+          </a:prstGeom>
+        </p:spPr>
+      </p:pic>
+      <p:sp>
+        <p:nvSpPr>
+          <p:cNvPr id="5" name="Rounded Rectangle 4"/>
+          <p:cNvSpPr/>
+          <p:nvPr/>
+        </p:nvSpPr>
+        <p:spPr>
+          <a:xfrm>
+            <a:off x="7955279" y="1645920"/>
+            <a:ext cx="3474720" cy="4572000"/>
+          </a:xfrm>
+          <a:prstGeom prst="roundRect">
+            <a:avLst/>
+          </a:prstGeom>
+          <a:solidFill>
+            <a:srgbClr val="0F172A"/>
+          </a:solidFill>
+          <a:ln>
+            <a:solidFill>
+              <a:srgbClr val="F59E0B"/>
+            </a:solidFill>
+          </a:ln>
+        </p:spPr>
+        <p:style>
+          <a:lnRef idx="1">
+            <a:schemeClr val="accent1"/>
+          </a:lnRef>
+          <a:fillRef idx="3">
+            <a:schemeClr val="accent1"/>
+          </a:fillRef>
+          <a:effectRef idx="2">
+            <a:schemeClr val="accent1"/>
+          </a:effectRef>
+          <a:fontRef idx="minor">
+            <a:schemeClr val="lt1"/>
+          </a:fontRef>
+        </p:style>
+        <p:txBody>
+          <a:bodyPr rtlCol="0" anchor="ctr" wrap="square"/>
+          <a:lstStyle/>
+          <a:p>
+            <a:pPr algn="ctr">
+              <a:defRPr sz="1500" b="1">
+                <a:solidFill>
+                  <a:srgbClr val="F59E0B"/>
+                </a:solidFill>
+              </a:defRPr>
+            </a:pPr>
+            <a:r>
+              <a:t>Mathematical Formulations</a:t>
+            </a:r>
+          </a:p>
+          <a:p>
+            <a:pPr>
+              <a:defRPr sz="1050">
+                <a:solidFill>
+                  <a:srgbClr val="F8FAFC"/>
+                </a:solidFill>
+              </a:defRPr>
+            </a:pPr>
+            <a:r>
+              <a:t>• Safety Stock (SS):</a:t>
+            </a:r>
+            <a:br/>
+            <a:r>
+              <a:t>  SS = Z * sqrt(L) * sigma_d</a:t>
+            </a:r>
+            <a:br/>
+            <a:r>
+              <a:t>  (Z = 1.96 for 98.5% Service Level)</a:t>
+            </a:r>
+          </a:p>
+          <a:p>
+            <a:pPr>
+              <a:defRPr sz="1050">
+                <a:solidFill>
+                  <a:srgbClr val="F8FAFC"/>
+                </a:solidFill>
+              </a:defRPr>
+            </a:pPr>
+            <a:r>
+              <a:t>• Reorder Point (ROP):</a:t>
+            </a:r>
+            <a:br/>
+            <a:r>
+              <a:t>  ROP = (d_daily * L) + SS</a:t>
+            </a:r>
+          </a:p>
+          <a:p>
+            <a:pPr>
+              <a:defRPr sz="1050">
+                <a:solidFill>
+                  <a:srgbClr val="F8FAFC"/>
+                </a:solidFill>
+              </a:defRPr>
+            </a:pPr>
+            <a:r>
+              <a:t>• Economic Order Quantity (EOQ):</a:t>
+            </a:r>
+            <a:br/>
+            <a:r>
+              <a:t>  EOQ = sqrt((2 * D * S) / H)</a:t>
+            </a:r>
+            <a:br/>
+            <a:r>
+              <a:t>  D = Annual Demand, S = Order Setup,</a:t>
+            </a:r>
+            <a:br/>
+            <a:r>
+              <a:t>  H = Unit Holding Carrying Cost</a:t>
+            </a:r>
+          </a:p>
+          <a:p>
+            <a:pPr>
+              <a:defRPr sz="1050">
+                <a:solidFill>
+                  <a:srgbClr val="F8FAFC"/>
+                </a:solidFill>
+              </a:defRPr>
+            </a:pPr>
+            <a:r>
+              <a:t>• Stockout Risk Forensics:</a:t>
+            </a:r>
+            <a:br/>
+            <a:r>
+              <a:t>  Risk% = (1 - CurrentStock / ROP) * 100</a:t>
+            </a:r>
+          </a:p>
+          <a:p>
+            <a:pPr>
+              <a:defRPr sz="1050">
+                <a:solidFill>
+                  <a:srgbClr val="F8FAFC"/>
+                </a:solidFill>
+              </a:defRPr>
+            </a:pPr>
+            <a:r>
+              <a:t>• Urgency Classification: CRITICAL (0), HIGH (&lt;= 60% ROP), MODERATE (&lt;= ROP).</a:t>
+            </a:r>
+          </a:p>
+        </p:txBody>
+      </p:sp>
+    </p:spTree>
+  </p:cSld>
+  <p:clrMapOvr>
+    <a:masterClrMapping/>
+  </p:clrMapOvr>
+</p:sld>
+</file>
+
+<file path=ppt/slides/slide11.xml><?xml version="1.0" encoding="utf-8"?>
+<p:sld xmlns:a="http://schemas.openxmlformats.org/drawingml/2006/main" xmlns:p="http://schemas.openxmlformats.org/presentationml/2006/main" xmlns:r="http://schemas.openxmlformats.org/officeDocument/2006/relationships">
+  <p:cSld>
+    <p:spTree>
+      <p:nvGrpSpPr>
+        <p:cNvPr id="1" name=""/>
+        <p:cNvGrpSpPr/>
+        <p:nvPr/>
+      </p:nvGrpSpPr>
+      <p:grpSpPr/>
+      <p:sp>
+        <p:nvSpPr>
+          <p:cNvPr id="2" name="Rectangle 1"/>
+          <p:cNvSpPr/>
+          <p:nvPr/>
+        </p:nvSpPr>
+        <p:spPr>
+          <a:xfrm>
+            <a:off x="0" y="0"/>
+            <a:ext cx="12191695" cy="6858000"/>
+          </a:xfrm>
+          <a:prstGeom prst="rect">
+            <a:avLst/>
+          </a:prstGeom>
+          <a:solidFill>
+            <a:srgbClr val="090E17"/>
+          </a:solidFill>
+          <a:ln>
+            <a:noFill/>
+          </a:ln>
+        </p:spPr>
+        <p:style>
+          <a:lnRef idx="1">
+            <a:schemeClr val="accent1"/>
+          </a:lnRef>
+          <a:fillRef idx="3">
+            <a:schemeClr val="accent1"/>
+          </a:fillRef>
+          <a:effectRef idx="2">
+            <a:schemeClr val="accent1"/>
+          </a:effectRef>
+          <a:fontRef idx="minor">
+            <a:schemeClr val="lt1"/>
+          </a:fontRef>
+        </p:style>
+        <p:txBody>
+          <a:bodyPr rtlCol="0" anchor="ctr"/>
+          <a:lstStyle/>
+          <a:p>
+            <a:pPr algn="ctr"/>
+          </a:p>
+        </p:txBody>
+      </p:sp>
+      <p:sp>
+        <p:nvSpPr>
+          <p:cNvPr id="3" name="TextBox 2"/>
+          <p:cNvSpPr txBox="1"/>
+          <p:nvPr/>
+        </p:nvSpPr>
+        <p:spPr>
+          <a:xfrm>
+            <a:off x="731520" y="365760"/>
+            <a:ext cx="10728655" cy="1005840"/>
+          </a:xfrm>
+          <a:prstGeom prst="rect">
+            <a:avLst/>
+          </a:prstGeom>
+          <a:noFill/>
+        </p:spPr>
+        <p:txBody>
+          <a:bodyPr wrap="square">
+            <a:spAutoFit/>
+          </a:bodyPr>
+          <a:lstStyle/>
+          <a:p>
+            <a:pPr>
+              <a:defRPr sz="1100" b="1">
+                <a:solidFill>
+                  <a:srgbClr val="6366F1"/>
+                </a:solidFill>
+              </a:defRPr>
+            </a:pPr>
+            <a:r>
+              <a:t>EVALUATION &amp; PERFORMANCE METRICS</a:t>
+            </a:r>
+          </a:p>
+          <a:p>
+            <a:pPr>
+              <a:defRPr sz="2200" b="1">
+                <a:solidFill>
+                  <a:srgbClr val="F8FAFC"/>
+                </a:solidFill>
+              </a:defRPr>
+            </a:pPr>
+            <a:r>
+              <a:t>Model Benchmark &amp; Holdout Cross-Validation Results</a:t>
+            </a:r>
+          </a:p>
+        </p:txBody>
+      </p:sp>
+      <p:sp>
+        <p:nvSpPr>
+          <p:cNvPr id="4" name="Rounded Rectangle 3"/>
+          <p:cNvSpPr/>
+          <p:nvPr/>
+        </p:nvSpPr>
+        <p:spPr>
+          <a:xfrm>
+            <a:off x="731520" y="1828800"/>
+            <a:ext cx="10728655" cy="960120"/>
+          </a:xfrm>
+          <a:prstGeom prst="roundRect">
+            <a:avLst/>
+          </a:prstGeom>
+          <a:solidFill>
+            <a:srgbClr val="0F172A"/>
+          </a:solidFill>
+          <a:ln>
+            <a:solidFill>
+              <a:srgbClr val="6366F1"/>
+            </a:solidFill>
+          </a:ln>
+        </p:spPr>
+        <p:style>
+          <a:lnRef idx="1">
+            <a:schemeClr val="accent1"/>
+          </a:lnRef>
+          <a:fillRef idx="3">
+            <a:schemeClr val="accent1"/>
+          </a:fillRef>
+          <a:effectRef idx="2">
+            <a:schemeClr val="accent1"/>
+          </a:effectRef>
+          <a:fontRef idx="minor">
+            <a:schemeClr val="lt1"/>
+          </a:fontRef>
+        </p:style>
+        <p:txBody>
+          <a:bodyPr rtlCol="0" anchor="ctr" wrap="square"/>
+          <a:lstStyle/>
+          <a:p>
+            <a:pPr algn="ctr">
+              <a:defRPr sz="1300" b="1">
+                <a:solidFill>
+                  <a:srgbClr val="6366F1"/>
+                </a:solidFill>
+              </a:defRPr>
+            </a:pPr>
+            <a:r>
+              <a:t>PYTORCH BI-LSTM  •  Active Production (Temporal Dynamics)</a:t>
+            </a:r>
+          </a:p>
+          <a:p>
+            <a:pPr>
+              <a:defRPr sz="1150">
+                <a:solidFill>
+                  <a:srgbClr val="F8FAFC"/>
+                </a:solidFill>
+              </a:defRPr>
+            </a:pPr>
+            <a:r>
+              <a:t>Coefficient of Determination (R²): 0.9327   |   MAE: 5.45 units   |   RMSE: 11.07   |   MAPE: 23.29%</a:t>
+            </a:r>
+          </a:p>
+        </p:txBody>
+      </p:sp>
+      <p:sp>
+        <p:nvSpPr>
+          <p:cNvPr id="5" name="Rounded Rectangle 4"/>
+          <p:cNvSpPr/>
+          <p:nvPr/>
+        </p:nvSpPr>
+        <p:spPr>
+          <a:xfrm>
+            <a:off x="731520" y="2971800"/>
+            <a:ext cx="10728655" cy="960120"/>
+          </a:xfrm>
+          <a:prstGeom prst="roundRect">
+            <a:avLst/>
+          </a:prstGeom>
+          <a:solidFill>
+            <a:srgbClr val="0F172A"/>
+          </a:solidFill>
+          <a:ln>
+            <a:solidFill>
+              <a:srgbClr val="10B981"/>
+            </a:solidFill>
+          </a:ln>
+        </p:spPr>
+        <p:style>
+          <a:lnRef idx="1">
+            <a:schemeClr val="accent1"/>
+          </a:lnRef>
+          <a:fillRef idx="3">
+            <a:schemeClr val="accent1"/>
+          </a:fillRef>
+          <a:effectRef idx="2">
+            <a:schemeClr val="accent1"/>
+          </a:effectRef>
+          <a:fontRef idx="minor">
+            <a:schemeClr val="lt1"/>
+          </a:fontRef>
+        </p:style>
+        <p:txBody>
+          <a:bodyPr rtlCol="0" anchor="ctr" wrap="square"/>
+          <a:lstStyle/>
+          <a:p>
+            <a:pPr algn="ctr">
+              <a:defRPr sz="1300" b="1">
+                <a:solidFill>
+                  <a:srgbClr val="10B981"/>
+                </a:solidFill>
+              </a:defRPr>
+            </a:pPr>
+            <a:r>
+              <a:t>RANDOM FOREST REGRESSOR  •  Benchmark Validated (100 Trees)</a:t>
+            </a:r>
+          </a:p>
+          <a:p>
+            <a:pPr>
+              <a:defRPr sz="1150">
+                <a:solidFill>
+                  <a:srgbClr val="F8FAFC"/>
+                </a:solidFill>
+              </a:defRPr>
+            </a:pPr>
+            <a:r>
+              <a:t>Coefficient of Determination (R²): 0.9668   |   MAE: 4.51 units   |   RMSE: 7.75   |   MAPE: 13.17%</a:t>
+            </a:r>
+          </a:p>
+        </p:txBody>
+      </p:sp>
+      <p:sp>
+        <p:nvSpPr>
+          <p:cNvPr id="6" name="Rounded Rectangle 5"/>
+          <p:cNvSpPr/>
+          <p:nvPr/>
+        </p:nvSpPr>
+        <p:spPr>
+          <a:xfrm>
+            <a:off x="731520" y="4114800"/>
+            <a:ext cx="10728655" cy="960120"/>
+          </a:xfrm>
+          <a:prstGeom prst="roundRect">
+            <a:avLst/>
+          </a:prstGeom>
+          <a:solidFill>
+            <a:srgbClr val="0F172A"/>
+          </a:solidFill>
+          <a:ln>
+            <a:solidFill>
+              <a:srgbClr val="A855F7"/>
+            </a:solidFill>
+          </a:ln>
+        </p:spPr>
+        <p:style>
+          <a:lnRef idx="1">
+            <a:schemeClr val="accent1"/>
+          </a:lnRef>
+          <a:fillRef idx="3">
+            <a:schemeClr val="accent1"/>
+          </a:fillRef>
+          <a:effectRef idx="2">
+            <a:schemeClr val="accent1"/>
+          </a:effectRef>
+          <a:fontRef idx="minor">
+            <a:schemeClr val="lt1"/>
+          </a:fontRef>
+        </p:style>
+        <p:txBody>
+          <a:bodyPr rtlCol="0" anchor="ctr" wrap="square"/>
+          <a:lstStyle/>
+          <a:p>
+            <a:pPr algn="ctr">
+              <a:defRPr sz="1300" b="1">
+                <a:solidFill>
+                  <a:srgbClr val="A855F7"/>
+                </a:solidFill>
+              </a:defRPr>
+            </a:pPr>
+            <a:r>
+              <a:t>GRADIENT BOOSTING REGRESSOR  •  Benchmark Validated (100 Estimators)</a:t>
+            </a:r>
+          </a:p>
+          <a:p>
+            <a:pPr>
+              <a:defRPr sz="1150">
+                <a:solidFill>
+                  <a:srgbClr val="F8FAFC"/>
+                </a:solidFill>
+              </a:defRPr>
+            </a:pPr>
+            <a:r>
+              <a:t>Coefficient of Determination (R²): 0.9670   |   MAE: 4.43 units   |   RMSE: 7.72   |   MAPE: 12.74%</a:t>
+            </a:r>
+          </a:p>
+        </p:txBody>
+      </p:sp>
+      <p:sp>
+        <p:nvSpPr>
+          <p:cNvPr id="7" name="Rounded Rectangle 6"/>
+          <p:cNvSpPr/>
+          <p:nvPr/>
+        </p:nvSpPr>
+        <p:spPr>
+          <a:xfrm>
+            <a:off x="731520" y="5257800"/>
+            <a:ext cx="10728655" cy="960120"/>
+          </a:xfrm>
+          <a:prstGeom prst="roundRect">
+            <a:avLst/>
+          </a:prstGeom>
+          <a:solidFill>
+            <a:srgbClr val="0F172A"/>
+          </a:solidFill>
+          <a:ln>
+            <a:solidFill>
+              <a:srgbClr val="F59E0B"/>
+            </a:solidFill>
+          </a:ln>
+        </p:spPr>
+        <p:style>
+          <a:lnRef idx="1">
+            <a:schemeClr val="accent1"/>
+          </a:lnRef>
+          <a:fillRef idx="3">
+            <a:schemeClr val="accent1"/>
+          </a:fillRef>
+          <a:effectRef idx="2">
+            <a:schemeClr val="accent1"/>
+          </a:effectRef>
+          <a:fontRef idx="minor">
+            <a:schemeClr val="lt1"/>
+          </a:fontRef>
+        </p:style>
+        <p:txBody>
+          <a:bodyPr rtlCol="0" anchor="ctr" wrap="square"/>
+          <a:lstStyle/>
+          <a:p>
+            <a:pPr algn="ctr">
+              <a:defRPr sz="1300" b="1">
+                <a:solidFill>
+                  <a:srgbClr val="F59E0B"/>
+                </a:solidFill>
+              </a:defRPr>
+            </a:pPr>
+            <a:r>
+              <a:t>ARIMA(2,1,2) BASELINE  •  Statistical Autoregressive Baseline</a:t>
+            </a:r>
+          </a:p>
+          <a:p>
+            <a:pPr>
+              <a:defRPr sz="1150">
+                <a:solidFill>
+                  <a:srgbClr val="F8FAFC"/>
+                </a:solidFill>
+              </a:defRPr>
+            </a:pPr>
+            <a:r>
+              <a:t>Coefficient of Determination (R²): 0.8468   |   MAE: 6.54 units   |   RMSE: 10.69   |   MAPE: 17.78%</a:t>
+            </a:r>
+          </a:p>
+        </p:txBody>
+      </p:sp>
+    </p:spTree>
+  </p:cSld>
+  <p:clrMapOvr>
+    <a:masterClrMapping/>
+  </p:clrMapOvr>
+</p:sld>
+</file>
+
+<file path=ppt/slides/slide12.xml><?xml version="1.0" encoding="utf-8"?>
+<p:sld xmlns:a="http://schemas.openxmlformats.org/drawingml/2006/main" xmlns:p="http://schemas.openxmlformats.org/presentationml/2006/main" xmlns:r="http://schemas.openxmlformats.org/officeDocument/2006/relationships">
+  <p:cSld>
+    <p:spTree>
+      <p:nvGrpSpPr>
+        <p:cNvPr id="1" name=""/>
+        <p:cNvGrpSpPr/>
+        <p:nvPr/>
+      </p:nvGrpSpPr>
+      <p:grpSpPr/>
+      <p:sp>
+        <p:nvSpPr>
+          <p:cNvPr id="2" name="Rectangle 1"/>
+          <p:cNvSpPr/>
+          <p:nvPr/>
+        </p:nvSpPr>
+        <p:spPr>
+          <a:xfrm>
+            <a:off x="0" y="0"/>
+            <a:ext cx="12191695" cy="6858000"/>
+          </a:xfrm>
+          <a:prstGeom prst="rect">
+            <a:avLst/>
+          </a:prstGeom>
+          <a:solidFill>
+            <a:srgbClr val="090E17"/>
+          </a:solidFill>
+          <a:ln>
+            <a:noFill/>
+          </a:ln>
+        </p:spPr>
+        <p:style>
+          <a:lnRef idx="1">
+            <a:schemeClr val="accent1"/>
+          </a:lnRef>
+          <a:fillRef idx="3">
+            <a:schemeClr val="accent1"/>
+          </a:fillRef>
+          <a:effectRef idx="2">
+            <a:schemeClr val="accent1"/>
+          </a:effectRef>
+          <a:fontRef idx="minor">
+            <a:schemeClr val="lt1"/>
+          </a:fontRef>
+        </p:style>
+        <p:txBody>
+          <a:bodyPr rtlCol="0" anchor="ctr"/>
+          <a:lstStyle/>
+          <a:p>
+            <a:pPr algn="ctr"/>
+          </a:p>
+        </p:txBody>
+      </p:sp>
+      <p:sp>
+        <p:nvSpPr>
+          <p:cNvPr id="3" name="TextBox 2"/>
+          <p:cNvSpPr txBox="1"/>
+          <p:nvPr/>
+        </p:nvSpPr>
+        <p:spPr>
+          <a:xfrm>
+            <a:off x="731520" y="365760"/>
+            <a:ext cx="10728655" cy="1005840"/>
+          </a:xfrm>
+          <a:prstGeom prst="rect">
+            <a:avLst/>
+          </a:prstGeom>
+          <a:noFill/>
+        </p:spPr>
+        <p:txBody>
+          <a:bodyPr wrap="square">
+            <a:spAutoFit/>
+          </a:bodyPr>
+          <a:lstStyle/>
+          <a:p>
+            <a:pPr>
+              <a:defRPr sz="1100" b="1">
+                <a:solidFill>
+                  <a:srgbClr val="6366F1"/>
+                </a:solidFill>
+              </a:defRPr>
+            </a:pPr>
+            <a:r>
+              <a:t>GOVERNANCE &amp; AUDIT TRAIL</a:t>
+            </a:r>
+          </a:p>
+          <a:p>
+            <a:pPr>
+              <a:defRPr sz="2200" b="1">
+                <a:solidFill>
+                  <a:srgbClr val="F8FAFC"/>
+                </a:solidFill>
+              </a:defRPr>
+            </a:pPr>
+            <a:r>
+              <a:t>Compliance, Financial Audit &amp; CSV Reporting Engine</a:t>
+            </a:r>
+          </a:p>
+        </p:txBody>
+      </p:sp>
+      <p:pic>
+        <p:nvPicPr>
+          <p:cNvPr id="4" name="Picture 3" descr="06_management_reports_csv_export.png"/>
+          <p:cNvPicPr>
+            <a:picLocks noChangeAspect="1"/>
+          </p:cNvPicPr>
+          <p:nvPr/>
+        </p:nvPicPr>
+        <p:blipFill>
+          <a:blip r:embed="rId2"/>
+          <a:stretch>
+            <a:fillRect/>
+          </a:stretch>
+        </p:blipFill>
+        <p:spPr>
+          <a:xfrm>
+            <a:off x="731520" y="1645920"/>
+            <a:ext cx="6949440" cy="4343400"/>
+          </a:xfrm>
+          <a:prstGeom prst="rect">
+            <a:avLst/>
+          </a:prstGeom>
+        </p:spPr>
+      </p:pic>
+      <p:sp>
+        <p:nvSpPr>
+          <p:cNvPr id="5" name="Rounded Rectangle 4"/>
+          <p:cNvSpPr/>
+          <p:nvPr/>
+        </p:nvSpPr>
+        <p:spPr>
+          <a:xfrm>
+            <a:off x="7955279" y="1645920"/>
+            <a:ext cx="3474720" cy="4572000"/>
+          </a:xfrm>
+          <a:prstGeom prst="roundRect">
+            <a:avLst/>
+          </a:prstGeom>
+          <a:solidFill>
+            <a:srgbClr val="0F172A"/>
+          </a:solidFill>
+          <a:ln>
+            <a:solidFill>
+              <a:srgbClr val="10B981"/>
+            </a:solidFill>
+          </a:ln>
+        </p:spPr>
+        <p:style>
+          <a:lnRef idx="1">
+            <a:schemeClr val="accent1"/>
+          </a:lnRef>
+          <a:fillRef idx="3">
+            <a:schemeClr val="accent1"/>
+          </a:fillRef>
+          <a:effectRef idx="2">
+            <a:schemeClr val="accent1"/>
+          </a:effectRef>
+          <a:fontRef idx="minor">
+            <a:schemeClr val="lt1"/>
+          </a:fontRef>
+        </p:style>
+        <p:txBody>
+          <a:bodyPr rtlCol="0" anchor="ctr" wrap="square"/>
+          <a:lstStyle/>
+          <a:p>
+            <a:pPr algn="ctr">
+              <a:defRPr sz="1600" b="1">
+                <a:solidFill>
+                  <a:srgbClr val="10B981"/>
+                </a:solidFill>
+              </a:defRPr>
+            </a:pPr>
+            <a:r>
+              <a:t>Audit Reporting Features</a:t>
+            </a:r>
+          </a:p>
+          <a:p>
+            <a:pPr>
+              <a:defRPr sz="1150">
+                <a:solidFill>
+                  <a:srgbClr val="94A3B8"/>
+                </a:solidFill>
+              </a:defRPr>
+            </a:pPr>
+            <a:r>
+              <a:t>• Inventory Catalog Export: Detailed ledger containing SKUs, purchase prices, valuations, and bin locations.</a:t>
+            </a:r>
+          </a:p>
+          <a:p>
+            <a:pPr>
+              <a:defRPr sz="1150">
+                <a:solidFill>
+                  <a:srgbClr val="94A3B8"/>
+                </a:solidFill>
+              </a:defRPr>
+            </a:pPr>
+            <a:r>
+              <a:t>• POS Sales Ledger Export: Timestamped customer receipts, quantities sold, revenue, and payment types.</a:t>
+            </a:r>
+          </a:p>
+          <a:p>
+            <a:pPr>
+              <a:defRPr sz="1150">
+                <a:solidFill>
+                  <a:srgbClr val="94A3B8"/>
+                </a:solidFill>
+              </a:defRPr>
+            </a:pPr>
+            <a:r>
+              <a:t>• Stock Movements Audit Trail: Immutable record of every IN, OUT, and AUDIT_ADJUSTMENT event.</a:t>
+            </a:r>
+          </a:p>
+          <a:p>
+            <a:pPr>
+              <a:defRPr sz="1150">
+                <a:solidFill>
+                  <a:srgbClr val="94A3B8"/>
+                </a:solidFill>
+              </a:defRPr>
+            </a:pPr>
+            <a:r>
+              <a:t>• Accounting Compliance: Formatted CSV streaming directly compatible with Microsoft Excel and ERP SAP/Oracle systems.</a:t>
+            </a:r>
+          </a:p>
+          <a:p>
+            <a:pPr>
+              <a:defRPr sz="1150">
+                <a:solidFill>
+                  <a:srgbClr val="94A3B8"/>
+                </a:solidFill>
+              </a:defRPr>
+            </a:pPr>
+            <a:r>
+              <a:t>• Revenue Analytics: Real-time category-wise sales and inventory asset margin summaries.</a:t>
+            </a:r>
+          </a:p>
+        </p:txBody>
+      </p:sp>
+    </p:spTree>
+  </p:cSld>
+  <p:clrMapOvr>
+    <a:masterClrMapping/>
+  </p:clrMapOvr>
+</p:sld>
+</file>
+
+<file path=ppt/slides/slide13.xml><?xml version="1.0" encoding="utf-8"?>
+<p:sld xmlns:a="http://schemas.openxmlformats.org/drawingml/2006/main" xmlns:p="http://schemas.openxmlformats.org/presentationml/2006/main" xmlns:r="http://schemas.openxmlformats.org/officeDocument/2006/relationships">
+  <p:cSld>
+    <p:spTree>
+      <p:nvGrpSpPr>
+        <p:cNvPr id="1" name=""/>
+        <p:cNvGrpSpPr/>
+        <p:nvPr/>
+      </p:nvGrpSpPr>
+      <p:grpSpPr/>
+      <p:sp>
+        <p:nvSpPr>
+          <p:cNvPr id="2" name="Rectangle 1"/>
+          <p:cNvSpPr/>
+          <p:nvPr/>
+        </p:nvSpPr>
+        <p:spPr>
+          <a:xfrm>
+            <a:off x="0" y="0"/>
+            <a:ext cx="12191695" cy="6858000"/>
+          </a:xfrm>
+          <a:prstGeom prst="rect">
+            <a:avLst/>
+          </a:prstGeom>
+          <a:solidFill>
+            <a:srgbClr val="090E17"/>
+          </a:solidFill>
+          <a:ln>
+            <a:noFill/>
+          </a:ln>
+        </p:spPr>
+        <p:style>
+          <a:lnRef idx="1">
+            <a:schemeClr val="accent1"/>
+          </a:lnRef>
+          <a:fillRef idx="3">
+            <a:schemeClr val="accent1"/>
+          </a:fillRef>
+          <a:effectRef idx="2">
+            <a:schemeClr val="accent1"/>
+          </a:effectRef>
+          <a:fontRef idx="minor">
+            <a:schemeClr val="lt1"/>
+          </a:fontRef>
+        </p:style>
+        <p:txBody>
+          <a:bodyPr rtlCol="0" anchor="ctr"/>
+          <a:lstStyle/>
+          <a:p>
+            <a:pPr algn="ctr"/>
+          </a:p>
+        </p:txBody>
+      </p:sp>
+      <p:sp>
+        <p:nvSpPr>
+          <p:cNvPr id="3" name="TextBox 2"/>
+          <p:cNvSpPr txBox="1"/>
+          <p:nvPr/>
+        </p:nvSpPr>
+        <p:spPr>
+          <a:xfrm>
+            <a:off x="731520" y="365760"/>
+            <a:ext cx="10728655" cy="1005840"/>
+          </a:xfrm>
+          <a:prstGeom prst="rect">
+            <a:avLst/>
+          </a:prstGeom>
+          <a:noFill/>
+        </p:spPr>
+        <p:txBody>
+          <a:bodyPr wrap="square">
+            <a:spAutoFit/>
+          </a:bodyPr>
+          <a:lstStyle/>
+          <a:p>
+            <a:pPr>
+              <a:defRPr sz="1100" b="1">
+                <a:solidFill>
+                  <a:srgbClr val="6366F1"/>
+                </a:solidFill>
+              </a:defRPr>
+            </a:pPr>
+            <a:r>
+              <a:t>DATA ARCHITECTURE</a:t>
+            </a:r>
+          </a:p>
+          <a:p>
+            <a:pPr>
+              <a:defRPr sz="2200" b="1">
+                <a:solidFill>
+                  <a:srgbClr val="F8FAFC"/>
+                </a:solidFill>
+              </a:defRPr>
+            </a:pPr>
+            <a:r>
+              <a:t>Relational Schema &amp; Database Transactional Integrity</a:t>
+            </a:r>
+          </a:p>
+        </p:txBody>
+      </p:sp>
+      <p:pic>
+        <p:nvPicPr>
+          <p:cNvPr id="4" name="Picture 3" descr="08_relational_schema_ledger.png"/>
+          <p:cNvPicPr>
+            <a:picLocks noChangeAspect="1"/>
+          </p:cNvPicPr>
+          <p:nvPr/>
+        </p:nvPicPr>
+        <p:blipFill>
+          <a:blip r:embed="rId2"/>
+          <a:stretch>
+            <a:fillRect/>
+          </a:stretch>
+        </p:blipFill>
+        <p:spPr>
+          <a:xfrm>
+            <a:off x="731520" y="1645920"/>
+            <a:ext cx="6949440" cy="4343400"/>
+          </a:xfrm>
+          <a:prstGeom prst="rect">
+            <a:avLst/>
+          </a:prstGeom>
+        </p:spPr>
+      </p:pic>
+      <p:sp>
+        <p:nvSpPr>
+          <p:cNvPr id="5" name="Rounded Rectangle 4"/>
+          <p:cNvSpPr/>
+          <p:nvPr/>
+        </p:nvSpPr>
+        <p:spPr>
+          <a:xfrm>
+            <a:off x="7955279" y="1645920"/>
+            <a:ext cx="3474720" cy="4572000"/>
+          </a:xfrm>
+          <a:prstGeom prst="roundRect">
+            <a:avLst/>
+          </a:prstGeom>
+          <a:solidFill>
+            <a:srgbClr val="0F172A"/>
+          </a:solidFill>
+          <a:ln>
+            <a:solidFill>
+              <a:srgbClr val="06B6D4"/>
+            </a:solidFill>
+          </a:ln>
+        </p:spPr>
+        <p:style>
+          <a:lnRef idx="1">
+            <a:schemeClr val="accent1"/>
+          </a:lnRef>
+          <a:fillRef idx="3">
+            <a:schemeClr val="accent1"/>
+          </a:fillRef>
+          <a:effectRef idx="2">
+            <a:schemeClr val="accent1"/>
+          </a:effectRef>
+          <a:fontRef idx="minor">
+            <a:schemeClr val="lt1"/>
+          </a:fontRef>
+        </p:style>
+        <p:txBody>
+          <a:bodyPr rtlCol="0" anchor="ctr" wrap="square"/>
+          <a:lstStyle/>
+          <a:p>
+            <a:pPr algn="ctr">
+              <a:defRPr sz="1600" b="1">
+                <a:solidFill>
+                  <a:srgbClr val="06B6D4"/>
+                </a:solidFill>
+              </a:defRPr>
+            </a:pPr>
+            <a:r>
+              <a:t>Relational Integrity</a:t>
+            </a:r>
+          </a:p>
+          <a:p>
+            <a:pPr>
+              <a:defRPr sz="1150">
+                <a:solidFill>
+                  <a:srgbClr val="94A3B8"/>
+                </a:solidFill>
+              </a:defRPr>
+            </a:pPr>
+            <a:r>
+              <a:t>• 9 Enterprise Tables: products, categories, suppliers, purchase_orders, purchase_order_items, shipments, iot_devices, stock_movements, sales.</a:t>
+            </a:r>
+          </a:p>
+          <a:p>
+            <a:pPr>
+              <a:defRPr sz="1150">
+                <a:solidFill>
+                  <a:srgbClr val="94A3B8"/>
+                </a:solidFill>
+              </a:defRPr>
+            </a:pPr>
+            <a:r>
+              <a:t>• Dual Engine Architecture: Native MySQL production support with seamless zero-config local SQLite fallback.</a:t>
+            </a:r>
+          </a:p>
+          <a:p>
+            <a:pPr>
+              <a:defRPr sz="1150">
+                <a:solidFill>
+                  <a:srgbClr val="94A3B8"/>
+                </a:solidFill>
+              </a:defRPr>
+            </a:pPr>
+            <a:r>
+              <a:t>• ACID Transactions: Atomic inventory decrements during checkout prevent overselling.</a:t>
+            </a:r>
+          </a:p>
+          <a:p>
+            <a:pPr>
+              <a:defRPr sz="1150">
+                <a:solidFill>
+                  <a:srgbClr val="94A3B8"/>
+                </a:solidFill>
+              </a:defRPr>
+            </a:pPr>
+            <a:r>
+              <a:t>• Historical Seeding: Auto-seeds 8 enterprise SKUs, suppliers, POs, and sensor devices upon launch.</a:t>
+            </a:r>
+          </a:p>
+        </p:txBody>
+      </p:sp>
+    </p:spTree>
+  </p:cSld>
+  <p:clrMapOvr>
+    <a:masterClrMapping/>
+  </p:clrMapOvr>
+</p:sld>
+</file>
+
+<file path=ppt/slides/slide14.xml><?xml version="1.0" encoding="utf-8"?>
+<p:sld xmlns:a="http://schemas.openxmlformats.org/drawingml/2006/main" xmlns:p="http://schemas.openxmlformats.org/presentationml/2006/main" xmlns:r="http://schemas.openxmlformats.org/officeDocument/2006/relationships">
+  <p:cSld>
+    <p:spTree>
+      <p:nvGrpSpPr>
+        <p:cNvPr id="1" name=""/>
+        <p:cNvGrpSpPr/>
+        <p:nvPr/>
+      </p:nvGrpSpPr>
+      <p:grpSpPr/>
+      <p:sp>
+        <p:nvSpPr>
+          <p:cNvPr id="2" name="Rectangle 1"/>
+          <p:cNvSpPr/>
+          <p:nvPr/>
+        </p:nvSpPr>
+        <p:spPr>
+          <a:xfrm>
+            <a:off x="0" y="0"/>
+            <a:ext cx="12191695" cy="6858000"/>
+          </a:xfrm>
+          <a:prstGeom prst="rect">
+            <a:avLst/>
+          </a:prstGeom>
+          <a:solidFill>
+            <a:srgbClr val="090E17"/>
+          </a:solidFill>
+          <a:ln>
+            <a:noFill/>
+          </a:ln>
+        </p:spPr>
+        <p:style>
+          <a:lnRef idx="1">
+            <a:schemeClr val="accent1"/>
+          </a:lnRef>
+          <a:fillRef idx="3">
+            <a:schemeClr val="accent1"/>
+          </a:fillRef>
+          <a:effectRef idx="2">
+            <a:schemeClr val="accent1"/>
+          </a:effectRef>
+          <a:fontRef idx="minor">
+            <a:schemeClr val="lt1"/>
+          </a:fontRef>
+        </p:style>
+        <p:txBody>
+          <a:bodyPr rtlCol="0" anchor="ctr"/>
+          <a:lstStyle/>
+          <a:p>
+            <a:pPr algn="ctr"/>
+          </a:p>
+        </p:txBody>
+      </p:sp>
+      <p:sp>
+        <p:nvSpPr>
+          <p:cNvPr id="3" name="TextBox 2"/>
+          <p:cNvSpPr txBox="1"/>
+          <p:nvPr/>
+        </p:nvSpPr>
+        <p:spPr>
+          <a:xfrm>
+            <a:off x="731520" y="365760"/>
+            <a:ext cx="10728655" cy="1005840"/>
+          </a:xfrm>
+          <a:prstGeom prst="rect">
+            <a:avLst/>
+          </a:prstGeom>
+          <a:noFill/>
+        </p:spPr>
+        <p:txBody>
+          <a:bodyPr wrap="square">
+            <a:spAutoFit/>
+          </a:bodyPr>
+          <a:lstStyle/>
+          <a:p>
+            <a:pPr>
+              <a:defRPr sz="1100" b="1">
+                <a:solidFill>
+                  <a:srgbClr val="6366F1"/>
+                </a:solidFill>
+              </a:defRPr>
+            </a:pPr>
+            <a:r>
+              <a:t>VERIFICATION &amp; RELIABILITY</a:t>
+            </a:r>
+          </a:p>
+          <a:p>
+            <a:pPr>
+              <a:defRPr sz="2200" b="1">
+                <a:solidFill>
+                  <a:srgbClr val="F8FAFC"/>
+                </a:solidFill>
+              </a:defRPr>
+            </a:pPr>
+            <a:r>
+              <a:t>Automated Testing &amp; Quality Assurance Suite</a:t>
+            </a:r>
+          </a:p>
+        </p:txBody>
+      </p:sp>
+      <p:sp>
+        <p:nvSpPr>
+          <p:cNvPr id="4" name="Rounded Rectangle 3"/>
+          <p:cNvSpPr/>
+          <p:nvPr/>
+        </p:nvSpPr>
+        <p:spPr>
+          <a:xfrm>
+            <a:off x="731520" y="1645920"/>
+            <a:ext cx="5120640" cy="4572000"/>
+          </a:xfrm>
+          <a:prstGeom prst="roundRect">
+            <a:avLst/>
+          </a:prstGeom>
+          <a:solidFill>
+            <a:srgbClr val="0F172A"/>
+          </a:solidFill>
+          <a:ln>
+            <a:solidFill>
+              <a:srgbClr val="10B981"/>
+            </a:solidFill>
+          </a:ln>
+        </p:spPr>
+        <p:style>
+          <a:lnRef idx="1">
+            <a:schemeClr val="accent1"/>
+          </a:lnRef>
+          <a:fillRef idx="3">
+            <a:schemeClr val="accent1"/>
+          </a:fillRef>
+          <a:effectRef idx="2">
+            <a:schemeClr val="accent1"/>
+          </a:effectRef>
+          <a:fontRef idx="minor">
+            <a:schemeClr val="lt1"/>
+          </a:fontRef>
+        </p:style>
+        <p:txBody>
+          <a:bodyPr rtlCol="0" anchor="ctr" wrap="square"/>
+          <a:lstStyle/>
+          <a:p>
+            <a:pPr algn="ctr">
+              <a:defRPr sz="1600" b="1">
+                <a:solidFill>
+                  <a:srgbClr val="10B981"/>
+                </a:solidFill>
+              </a:defRPr>
+            </a:pPr>
+            <a:r>
+              <a:t>Test Execution Summary</a:t>
+            </a:r>
+          </a:p>
+          <a:p>
+            <a:pPr>
+              <a:defRPr sz="1200">
+                <a:solidFill>
+                  <a:srgbClr val="F8FAFC"/>
+                </a:solidFill>
+              </a:defRPr>
+            </a:pPr>
+            <a:r>
+              <a:t>✔ Total Test Cases: 29 Automated Tests.</a:t>
+            </a:r>
+          </a:p>
+          <a:p>
+            <a:pPr>
+              <a:defRPr sz="1200">
+                <a:solidFill>
+                  <a:srgbClr val="F8FAFC"/>
+                </a:solidFill>
+              </a:defRPr>
+            </a:pPr>
+            <a:r>
+              <a:t>✔ Pass Rate: 100% (29/29 Passing, 0 Failures, 0 Errors).</a:t>
+            </a:r>
+          </a:p>
+          <a:p>
+            <a:pPr>
+              <a:defRPr sz="1200">
+                <a:solidFill>
+                  <a:srgbClr val="F8FAFC"/>
+                </a:solidFill>
+              </a:defRPr>
+            </a:pPr>
+            <a:r>
+              <a:t>✔ Execution Time: 1.782 seconds.</a:t>
+            </a:r>
+          </a:p>
+          <a:p>
+            <a:pPr>
+              <a:defRPr sz="1200">
+                <a:solidFill>
+                  <a:srgbClr val="F8FAFC"/>
+                </a:solidFill>
+              </a:defRPr>
+            </a:pPr>
+            <a:r>
+              <a:t>✔ Framework: Python unittest &amp; Flask Test Client.</a:t>
+            </a:r>
+          </a:p>
+          <a:p>
+            <a:pPr>
+              <a:defRPr sz="1200">
+                <a:solidFill>
+                  <a:srgbClr val="F8FAFC"/>
+                </a:solidFill>
+              </a:defRPr>
+            </a:pPr>
+            <a:r>
+              <a:t>✔ In-Memory SQLite Isolation: Tests run against ephemeral SQLite instances to guarantee test isolation.</a:t>
+            </a:r>
+          </a:p>
+          <a:p>
+            <a:pPr>
+              <a:defRPr sz="1200">
+                <a:solidFill>
+                  <a:srgbClr val="F8FAFC"/>
+                </a:solidFill>
+              </a:defRPr>
+            </a:pPr>
+            <a:r>
+              <a:t>✔ Continuous Quality Gate: Validates models, database transactions, ROP/EOQ formulas, and API routes.</a:t>
+            </a:r>
+          </a:p>
+        </p:txBody>
+      </p:sp>
+      <p:sp>
+        <p:nvSpPr>
+          <p:cNvPr id="5" name="Rounded Rectangle 4"/>
+          <p:cNvSpPr/>
+          <p:nvPr/>
+        </p:nvSpPr>
+        <p:spPr>
+          <a:xfrm>
+            <a:off x="6217920" y="1645920"/>
+            <a:ext cx="5212080" cy="4572000"/>
+          </a:xfrm>
+          <a:prstGeom prst="roundRect">
+            <a:avLst/>
+          </a:prstGeom>
+          <a:solidFill>
+            <a:srgbClr val="0F172A"/>
+          </a:solidFill>
+          <a:ln>
+            <a:solidFill>
+              <a:srgbClr val="6366F1"/>
+            </a:solidFill>
+          </a:ln>
+        </p:spPr>
+        <p:style>
+          <a:lnRef idx="1">
+            <a:schemeClr val="accent1"/>
+          </a:lnRef>
+          <a:fillRef idx="3">
+            <a:schemeClr val="accent1"/>
+          </a:fillRef>
+          <a:effectRef idx="2">
+            <a:schemeClr val="accent1"/>
+          </a:effectRef>
+          <a:fontRef idx="minor">
+            <a:schemeClr val="lt1"/>
+          </a:fontRef>
+        </p:style>
+        <p:txBody>
+          <a:bodyPr rtlCol="0" anchor="ctr" wrap="square"/>
+          <a:lstStyle/>
+          <a:p>
+            <a:pPr algn="ctr">
+              <a:defRPr sz="1600" b="1">
+                <a:solidFill>
+                  <a:srgbClr val="6366F1"/>
+                </a:solidFill>
+              </a:defRPr>
+            </a:pPr>
+            <a:r>
+              <a:t>Coverage Dimensions</a:t>
+            </a:r>
+          </a:p>
+          <a:p>
+            <a:pPr>
+              <a:defRPr sz="1200">
+                <a:solidFill>
+                  <a:srgbClr val="94A3B8"/>
+                </a:solidFill>
+              </a:defRPr>
+            </a:pPr>
+            <a:r>
+              <a:t>• Asset Integrity: Requirements, PPTX presentation, DOCX report, model weight files, and historical CSV dataset.</a:t>
+            </a:r>
+          </a:p>
+          <a:p>
+            <a:pPr>
+              <a:defRPr sz="1200">
+                <a:solidFill>
+                  <a:srgbClr val="94A3B8"/>
+                </a:solidFill>
+              </a:defRPr>
+            </a:pPr>
+            <a:r>
+              <a:t>• Neural Inference: PyTorch LSTM, RF, and GBM model inference execution, bounds, and confidence interval checks.</a:t>
+            </a:r>
+          </a:p>
+          <a:p>
+            <a:pPr>
+              <a:defRPr sz="1200">
+                <a:solidFill>
+                  <a:srgbClr val="94A3B8"/>
+                </a:solidFill>
+              </a:defRPr>
+            </a:pPr>
+            <a:r>
+              <a:t>• Inventory Mathematics: ROP, Safety Stock, EOQ calculations, and stockout risk boundary checks.</a:t>
+            </a:r>
+          </a:p>
+          <a:p>
+            <a:pPr>
+              <a:defRPr sz="1200">
+                <a:solidFill>
+                  <a:srgbClr val="94A3B8"/>
+                </a:solidFill>
+              </a:defRPr>
+            </a:pPr>
+            <a:r>
+              <a:t>• API Contracts: /api/health, /api/dashboard, /api/products, /api/forecast, /api/forecast/models, /api/forecast/product/&lt;sku&gt;.</a:t>
+            </a:r>
+          </a:p>
+          <a:p>
+            <a:pPr>
+              <a:defRPr sz="1200">
+                <a:solidFill>
+                  <a:srgbClr val="94A3B8"/>
+                </a:solidFill>
+              </a:defRPr>
+            </a:pPr>
+            <a:r>
+              <a:t>• Hardware Scanning: Laser barcode lookup, POS sale auto-checkout, inward restock, and RS232 load-cell scale telemetry.</a:t>
+            </a:r>
+          </a:p>
+        </p:txBody>
+      </p:sp>
+    </p:spTree>
+  </p:cSld>
+  <p:clrMapOvr>
+    <a:masterClrMapping/>
+  </p:clrMapOvr>
+</p:sld>
+</file>
+
+<file path=ppt/slides/slide15.xml><?xml version="1.0" encoding="utf-8"?>
+<p:sld xmlns:a="http://schemas.openxmlformats.org/drawingml/2006/main" xmlns:p="http://schemas.openxmlformats.org/presentationml/2006/main" xmlns:r="http://schemas.openxmlformats.org/officeDocument/2006/relationships">
+  <p:cSld>
+    <p:spTree>
+      <p:nvGrpSpPr>
+        <p:cNvPr id="1" name=""/>
+        <p:cNvGrpSpPr/>
+        <p:nvPr/>
+      </p:nvGrpSpPr>
+      <p:grpSpPr/>
+      <p:sp>
+        <p:nvSpPr>
+          <p:cNvPr id="2" name="Rectangle 1"/>
+          <p:cNvSpPr/>
+          <p:nvPr/>
+        </p:nvSpPr>
+        <p:spPr>
+          <a:xfrm>
+            <a:off x="0" y="0"/>
+            <a:ext cx="12191695" cy="6858000"/>
+          </a:xfrm>
+          <a:prstGeom prst="rect">
+            <a:avLst/>
+          </a:prstGeom>
+          <a:solidFill>
+            <a:srgbClr val="090E17"/>
+          </a:solidFill>
+          <a:ln>
+            <a:noFill/>
+          </a:ln>
+        </p:spPr>
+        <p:style>
+          <a:lnRef idx="1">
+            <a:schemeClr val="accent1"/>
+          </a:lnRef>
+          <a:fillRef idx="3">
+            <a:schemeClr val="accent1"/>
+          </a:fillRef>
+          <a:effectRef idx="2">
+            <a:schemeClr val="accent1"/>
+          </a:effectRef>
+          <a:fontRef idx="minor">
+            <a:schemeClr val="lt1"/>
+          </a:fontRef>
+        </p:style>
+        <p:txBody>
+          <a:bodyPr rtlCol="0" anchor="ctr"/>
+          <a:lstStyle/>
+          <a:p>
+            <a:pPr algn="ctr"/>
+          </a:p>
+        </p:txBody>
+      </p:sp>
+      <p:sp>
+        <p:nvSpPr>
+          <p:cNvPr id="3" name="TextBox 2"/>
+          <p:cNvSpPr txBox="1"/>
+          <p:nvPr/>
+        </p:nvSpPr>
+        <p:spPr>
+          <a:xfrm>
+            <a:off x="731520" y="365760"/>
+            <a:ext cx="10728655" cy="1005840"/>
+          </a:xfrm>
+          <a:prstGeom prst="rect">
+            <a:avLst/>
+          </a:prstGeom>
+          <a:noFill/>
+        </p:spPr>
+        <p:txBody>
+          <a:bodyPr wrap="square">
+            <a:spAutoFit/>
+          </a:bodyPr>
+          <a:lstStyle/>
+          <a:p>
+            <a:pPr>
+              <a:defRPr sz="1100" b="1">
+                <a:solidFill>
+                  <a:srgbClr val="6366F1"/>
+                </a:solidFill>
+              </a:defRPr>
+            </a:pPr>
+            <a:r>
+              <a:t>PROJECT COMPLETION</a:t>
+            </a:r>
+          </a:p>
+          <a:p>
+            <a:pPr>
+              <a:defRPr sz="2200" b="1">
+                <a:solidFill>
+                  <a:srgbClr val="F8FAFC"/>
+                </a:solidFill>
+              </a:defRPr>
+            </a:pPr>
+            <a:r>
+              <a:t>Conclusion, Capstone Deliverables &amp; Future Roadmap</a:t>
+            </a:r>
+          </a:p>
+        </p:txBody>
+      </p:sp>
+      <p:sp>
+        <p:nvSpPr>
+          <p:cNvPr id="4" name="Rounded Rectangle 3"/>
+          <p:cNvSpPr/>
+          <p:nvPr/>
+        </p:nvSpPr>
+        <p:spPr>
+          <a:xfrm>
+            <a:off x="731520" y="1645920"/>
+            <a:ext cx="5120640" cy="4572000"/>
+          </a:xfrm>
+          <a:prstGeom prst="roundRect">
+            <a:avLst/>
+          </a:prstGeom>
+          <a:solidFill>
+            <a:srgbClr val="0F172A"/>
+          </a:solidFill>
+          <a:ln>
+            <a:solidFill>
+              <a:srgbClr val="10B981"/>
+            </a:solidFill>
+          </a:ln>
+        </p:spPr>
+        <p:style>
+          <a:lnRef idx="1">
+            <a:schemeClr val="accent1"/>
+          </a:lnRef>
+          <a:fillRef idx="3">
+            <a:schemeClr val="accent1"/>
+          </a:fillRef>
+          <a:effectRef idx="2">
+            <a:schemeClr val="accent1"/>
+          </a:effectRef>
+          <a:fontRef idx="minor">
+            <a:schemeClr val="lt1"/>
+          </a:fontRef>
+        </p:style>
+        <p:txBody>
+          <a:bodyPr rtlCol="0" anchor="ctr" wrap="square"/>
+          <a:lstStyle/>
+          <a:p>
+            <a:pPr algn="ctr">
+              <a:defRPr sz="1600" b="1">
+                <a:solidFill>
+                  <a:srgbClr val="10B981"/>
+                </a:solidFill>
+              </a:defRPr>
+            </a:pPr>
+            <a:r>
+              <a:t>Capstone Verification Deliverables</a:t>
+            </a:r>
+          </a:p>
+          <a:p>
+            <a:pPr>
+              <a:defRPr sz="1200">
+                <a:solidFill>
+                  <a:srgbClr val="F8FAFC"/>
+                </a:solidFill>
+              </a:defRPr>
+            </a:pPr>
+            <a:r>
+              <a:t>✔ Dedicated Port Allocation: Port 5019 verified running with zero port collisions.</a:t>
+            </a:r>
+          </a:p>
+          <a:p>
+            <a:pPr>
+              <a:defRPr sz="1200">
+                <a:solidFill>
+                  <a:srgbClr val="F8FAFC"/>
+                </a:solidFill>
+              </a:defRPr>
+            </a:pPr>
+            <a:r>
+              <a:t>✔ Real Trained AI Weights: 43K PyTorch LSTM weights, 100-tree RF, and GBM regressors.</a:t>
+            </a:r>
+          </a:p>
+          <a:p>
+            <a:pPr>
+              <a:defRPr sz="1200">
+                <a:solidFill>
+                  <a:srgbClr val="F8FAFC"/>
+                </a:solidFill>
+              </a:defRPr>
+            </a:pPr>
+            <a:r>
+              <a:t>✔ Relational SQLite/MySQL DB: 9 relational tables seeded with realistic enterprise transactions.</a:t>
+            </a:r>
+          </a:p>
+          <a:p>
+            <a:pPr>
+              <a:defRPr sz="1200">
+                <a:solidFill>
+                  <a:srgbClr val="F8FAFC"/>
+                </a:solidFill>
+              </a:defRPr>
+            </a:pPr>
+            <a:r>
+              <a:t>✔ Quality Assurance: 29/29 passing tests with 100% pass rate.</a:t>
+            </a:r>
+          </a:p>
+          <a:p>
+            <a:pPr>
+              <a:defRPr sz="1200">
+                <a:solidFill>
+                  <a:srgbClr val="F8FAFC"/>
+                </a:solidFill>
+              </a:defRPr>
+            </a:pPr>
+            <a:r>
+              <a:t>✔ High-Resolution Visuals: 8 full-page UI screenshots captured via Puppeteer.</a:t>
+            </a:r>
+          </a:p>
+          <a:p>
+            <a:pPr>
+              <a:defRPr sz="1200">
+                <a:solidFill>
+                  <a:srgbClr val="F8FAFC"/>
+                </a:solidFill>
+              </a:defRPr>
+            </a:pPr>
+            <a:r>
+              <a:t>✔ Academic Technical Documentation: Formal 60+ paragraph DOCX + 8-file markdown suite.</a:t>
+            </a:r>
+          </a:p>
+          <a:p>
+            <a:pPr>
+              <a:defRPr sz="1200">
+                <a:solidFill>
+                  <a:srgbClr val="F8FAFC"/>
+                </a:solidFill>
+              </a:defRPr>
+            </a:pPr>
+            <a:r>
+              <a:t>✔ Video Walkthrough: Exact 180.0s (03:00) H.264 MP4 walkthrough.</a:t>
+            </a:r>
+          </a:p>
+        </p:txBody>
+      </p:sp>
+      <p:sp>
+        <p:nvSpPr>
+          <p:cNvPr id="5" name="Rounded Rectangle 4"/>
+          <p:cNvSpPr/>
+          <p:nvPr/>
+        </p:nvSpPr>
+        <p:spPr>
+          <a:xfrm>
+            <a:off x="6217920" y="1645920"/>
+            <a:ext cx="5212080" cy="4572000"/>
+          </a:xfrm>
+          <a:prstGeom prst="roundRect">
+            <a:avLst/>
+          </a:prstGeom>
+          <a:solidFill>
+            <a:srgbClr val="0F172A"/>
+          </a:solidFill>
+          <a:ln>
+            <a:solidFill>
+              <a:srgbClr val="06B6D4"/>
+            </a:solidFill>
+          </a:ln>
+        </p:spPr>
+        <p:style>
+          <a:lnRef idx="1">
+            <a:schemeClr val="accent1"/>
+          </a:lnRef>
+          <a:fillRef idx="3">
+            <a:schemeClr val="accent1"/>
+          </a:fillRef>
+          <a:effectRef idx="2">
+            <a:schemeClr val="accent1"/>
+          </a:effectRef>
+          <a:fontRef idx="minor">
+            <a:schemeClr val="lt1"/>
+          </a:fontRef>
+        </p:style>
+        <p:txBody>
+          <a:bodyPr rtlCol="0" anchor="ctr" wrap="square"/>
+          <a:lstStyle/>
+          <a:p>
+            <a:pPr algn="ctr">
+              <a:defRPr sz="1600" b="1">
+                <a:solidFill>
+                  <a:srgbClr val="06B6D4"/>
+                </a:solidFill>
+              </a:defRPr>
+            </a:pPr>
+            <a:r>
+              <a:t>Future Roadmap &amp; Industry Scaling</a:t>
+            </a:r>
+          </a:p>
+          <a:p>
+            <a:pPr>
+              <a:defRPr sz="1200">
+                <a:solidFill>
+                  <a:srgbClr val="94A3B8"/>
+                </a:solidFill>
+              </a:defRPr>
+            </a:pPr>
+            <a:r>
+              <a:t>➔ Multi-Warehouse Cross-Docking: Support inter-warehouse inventory rebalancing across distributed fulfilment nodes.</a:t>
+            </a:r>
+          </a:p>
+          <a:p>
+            <a:pPr>
+              <a:defRPr sz="1200">
+                <a:solidFill>
+                  <a:srgbClr val="94A3B8"/>
+                </a:solidFill>
+              </a:defRPr>
+            </a:pPr>
+            <a:r>
+              <a:t>➔ Computer Vision Shelf Cameras: Edge AI video inference for automated empty-shelf detection.</a:t>
+            </a:r>
+          </a:p>
+          <a:p>
+            <a:pPr>
+              <a:defRPr sz="1200">
+                <a:solidFill>
+                  <a:srgbClr val="94A3B8"/>
+                </a:solidFill>
+              </a:defRPr>
+            </a:pPr>
+            <a:r>
+              <a:t>➔ Automated EDI Purchase Orders: Direct Electronic Data Interchange integration with wholesaler ERP systems.</a:t>
+            </a:r>
+          </a:p>
+          <a:p>
+            <a:pPr>
+              <a:defRPr sz="1200">
+                <a:solidFill>
+                  <a:srgbClr val="94A3B8"/>
+                </a:solidFill>
+              </a:defRPr>
+            </a:pPr>
+            <a:r>
+              <a:t>➔ Transformer-Based Demand Forecasting: Temporal Fusion Transformers (TFT) for multi-year macro trends.</a:t>
+            </a:r>
+          </a:p>
+          <a:p>
+            <a:pPr>
+              <a:defRPr sz="1200">
+                <a:solidFill>
+                  <a:srgbClr val="94A3B8"/>
+                </a:solidFill>
+              </a:defRPr>
+            </a:pPr>
+            <a:r>
+              <a:t>➔ Autonomous Guided Vehicle (AGV) Routing: Automated routing of warehouse pickers using IoT beacons.</a:t>
             </a:r>
           </a:p>
         </p:txBody>
@@ -3230,16 +5082,108 @@
         <p:spPr>
           <a:xfrm>
             <a:off x="0" y="0"/>
-            <a:ext cx="12191695" cy="1097280"/>
+            <a:ext cx="12191695" cy="6858000"/>
           </a:xfrm>
           <a:prstGeom prst="rect">
+            <a:avLst/>
+          </a:prstGeom>
+          <a:solidFill>
+            <a:srgbClr val="090E17"/>
+          </a:solidFill>
+          <a:ln>
+            <a:noFill/>
+          </a:ln>
+        </p:spPr>
+        <p:style>
+          <a:lnRef idx="1">
+            <a:schemeClr val="accent1"/>
+          </a:lnRef>
+          <a:fillRef idx="3">
+            <a:schemeClr val="accent1"/>
+          </a:fillRef>
+          <a:effectRef idx="2">
+            <a:schemeClr val="accent1"/>
+          </a:effectRef>
+          <a:fontRef idx="minor">
+            <a:schemeClr val="lt1"/>
+          </a:fontRef>
+        </p:style>
+        <p:txBody>
+          <a:bodyPr rtlCol="0" anchor="ctr"/>
+          <a:lstStyle/>
+          <a:p>
+            <a:pPr algn="ctr"/>
+          </a:p>
+        </p:txBody>
+      </p:sp>
+      <p:sp>
+        <p:nvSpPr>
+          <p:cNvPr id="3" name="TextBox 2"/>
+          <p:cNvSpPr txBox="1"/>
+          <p:nvPr/>
+        </p:nvSpPr>
+        <p:spPr>
+          <a:xfrm>
+            <a:off x="731520" y="365760"/>
+            <a:ext cx="10728655" cy="1005840"/>
+          </a:xfrm>
+          <a:prstGeom prst="rect">
+            <a:avLst/>
+          </a:prstGeom>
+          <a:noFill/>
+        </p:spPr>
+        <p:txBody>
+          <a:bodyPr wrap="square">
+            <a:spAutoFit/>
+          </a:bodyPr>
+          <a:lstStyle/>
+          <a:p>
+            <a:pPr>
+              <a:defRPr sz="1100" b="1">
+                <a:solidFill>
+                  <a:srgbClr val="6366F1"/>
+                </a:solidFill>
+              </a:defRPr>
+            </a:pPr>
+            <a:r>
+              <a:t>ENTERPRISE IOT &amp; TIME-SERIES DEEP LEARNING • PROJECT-019</a:t>
+            </a:r>
+          </a:p>
+          <a:p>
+            <a:pPr>
+              <a:defRPr sz="2200" b="1">
+                <a:solidFill>
+                  <a:srgbClr val="F8FAFC"/>
+                </a:solidFill>
+              </a:defRPr>
+            </a:pPr>
+            <a:r>
+              <a:t>Executive Summary &amp; Industrial Inventory Challenges</a:t>
+            </a:r>
+          </a:p>
+        </p:txBody>
+      </p:sp>
+      <p:sp>
+        <p:nvSpPr>
+          <p:cNvPr id="4" name="Rounded Rectangle 3"/>
+          <p:cNvSpPr/>
+          <p:nvPr/>
+        </p:nvSpPr>
+        <p:spPr>
+          <a:xfrm>
+            <a:off x="731520" y="1645920"/>
+            <a:ext cx="5120640" cy="4572000"/>
+          </a:xfrm>
+          <a:prstGeom prst="roundRect">
             <a:avLst/>
           </a:prstGeom>
           <a:solidFill>
             <a:srgbClr val="0F172A"/>
           </a:solidFill>
           <a:ln>
-            <a:noFill/>
+            <a:solidFill>
+              <a:srgbClr val="6366F1"/>
+            </a:solidFill>
           </a:ln>
         </p:spPr>
         <p:style>
@@ -3257,162 +5201,204 @@
           </a:fontRef>
         </p:style>
         <p:txBody>
-          <a:bodyPr rtlCol="0" anchor="ctr"/>
-          <a:lstStyle/>
-          <a:p>
-            <a:pPr algn="ctr"/>
-          </a:p>
-        </p:txBody>
-      </p:sp>
-      <p:sp>
-        <p:nvSpPr>
-          <p:cNvPr id="3" name="TextBox 2"/>
-          <p:cNvSpPr txBox="1"/>
+          <a:bodyPr rtlCol="0" anchor="ctr" wrap="square"/>
+          <a:lstStyle/>
+          <a:p>
+            <a:pPr algn="ctr">
+              <a:defRPr sz="1600" b="1">
+                <a:solidFill>
+                  <a:srgbClr val="F8FAFC"/>
+                </a:solidFill>
+              </a:defRPr>
+            </a:pPr>
+            <a:r>
+              <a:t>The Modern Warehouse Dilemma</a:t>
+            </a:r>
+          </a:p>
+          <a:p>
+            <a:pPr>
+              <a:defRPr sz="1200">
+                <a:solidFill>
+                  <a:srgbClr val="94A3B8"/>
+                </a:solidFill>
+              </a:defRPr>
+            </a:pPr>
+            <a:r>
+              <a:t>• Inventory Carrying Cost: Excess holding costs tie up 20-30% of operational capital.</a:t>
+            </a:r>
+          </a:p>
+          <a:p>
+            <a:pPr>
+              <a:defRPr sz="1200">
+                <a:solidFill>
+                  <a:srgbClr val="94A3B8"/>
+                </a:solidFill>
+              </a:defRPr>
+            </a:pPr>
+            <a:r>
+              <a:t>• Stockouts &amp; Lost Revenue: Stockout incidents cause 8% average revenue leakage in retail.</a:t>
+            </a:r>
+          </a:p>
+          <a:p>
+            <a:pPr>
+              <a:defRPr sz="1200">
+                <a:solidFill>
+                  <a:srgbClr val="94A3B8"/>
+                </a:solidFill>
+              </a:defRPr>
+            </a:pPr>
+            <a:r>
+              <a:t>• Manual Audit Latency: Periodic physical stock counts suffer from 12-18% human discrepancy.</a:t>
+            </a:r>
+          </a:p>
+          <a:p>
+            <a:pPr>
+              <a:defRPr sz="1200">
+                <a:solidFill>
+                  <a:srgbClr val="94A3B8"/>
+                </a:solidFill>
+              </a:defRPr>
+            </a:pPr>
+            <a:r>
+              <a:t>• Static Safety Stock Buffers: Outdated rule-of-thumb heuristics fail during demand spikes.</a:t>
+            </a:r>
+          </a:p>
+          <a:p>
+            <a:pPr>
+              <a:defRPr sz="1200">
+                <a:solidFill>
+                  <a:srgbClr val="94A3B8"/>
+                </a:solidFill>
+              </a:defRPr>
+            </a:pPr>
+            <a:r>
+              <a:t>• Disconnected Hardware: Barcode scanners, UHF gates, and weight shelves operate in silos.</a:t>
+            </a:r>
+          </a:p>
+        </p:txBody>
+      </p:sp>
+      <p:sp>
+        <p:nvSpPr>
+          <p:cNvPr id="5" name="Rounded Rectangle 4"/>
+          <p:cNvSpPr/>
           <p:nvPr/>
         </p:nvSpPr>
         <p:spPr>
           <a:xfrm>
-            <a:off x="731520" y="137160"/>
-            <a:ext cx="10698480" cy="822960"/>
-          </a:xfrm>
-          <a:prstGeom prst="rect">
+            <a:off x="6217920" y="1645920"/>
+            <a:ext cx="5212080" cy="4572000"/>
+          </a:xfrm>
+          <a:prstGeom prst="roundRect">
             <a:avLst/>
           </a:prstGeom>
-          <a:noFill/>
-        </p:spPr>
-        <p:txBody>
-          <a:bodyPr wrap="square">
-            <a:spAutoFit/>
-          </a:bodyPr>
-          <a:lstStyle/>
-          <a:p>
-            <a:pPr>
-              <a:defRPr sz="2400" b="1">
-                <a:solidFill>
-                  <a:srgbClr val="FFFFFF"/>
-                </a:solidFill>
-              </a:defRPr>
-            </a:pPr>
-            <a:r>
-              <a:t>1. Background &amp; Industrial Motivation</a:t>
-            </a:r>
-          </a:p>
-          <a:p>
-            <a:pPr>
-              <a:defRPr sz="1100">
-                <a:solidFill>
-                  <a:srgbClr val="94A3B8"/>
-                </a:solidFill>
-              </a:defRPr>
-            </a:pPr>
-            <a:r>
-              <a:t>Academic &amp; Industrial AI Project Series  |  Project 19 of 55</a:t>
-            </a:r>
-          </a:p>
-        </p:txBody>
-      </p:sp>
-      <p:sp>
-        <p:nvSpPr>
-          <p:cNvPr id="4" name="TextBox 3"/>
-          <p:cNvSpPr txBox="1"/>
-          <p:nvPr/>
-        </p:nvSpPr>
-        <p:spPr>
-          <a:xfrm>
-            <a:off x="731520" y="1371600"/>
-            <a:ext cx="10698480" cy="5029200"/>
-          </a:xfrm>
-          <a:prstGeom prst="rect">
-            <a:avLst/>
-          </a:prstGeom>
-          <a:noFill/>
-        </p:spPr>
-        <p:txBody>
-          <a:bodyPr wrap="square">
-            <a:spAutoFit/>
-          </a:bodyPr>
-          <a:lstStyle/>
-          <a:p>
-            <a:pPr>
-              <a:defRPr sz="1800" b="1">
-                <a:solidFill>
-                  <a:srgbClr val="1E3A8A"/>
-                </a:solidFill>
-              </a:defRPr>
-            </a:pPr>
-            <a:r>
-              <a:t>Executive Problem Background:</a:t>
-            </a:r>
-          </a:p>
-          <a:p>
-            <a:pPr>
-              <a:spcBef>
-                <a:spcPts val="1000"/>
-              </a:spcBef>
-              <a:defRPr sz="1400">
-                <a:solidFill>
-                  <a:srgbClr val="334155"/>
-                </a:solidFill>
-              </a:defRPr>
-            </a:pPr>
-            <a:r>
-              <a:t>This work is aimed at developing a hardware based system named Stock Management System for managing the stock system of any organization. The Stock Management System (SMS) refers to the system and processes to manage the stock of organization with the involvement of Technology system. This system can be used to store the details of the stock, stock maintenance, update the stock based on the sales details, and generate sales and stock report daily or weekly based. This project is categorize indiv...</a:t>
-            </a:r>
-          </a:p>
-          <a:p>
-            <a:pPr>
-              <a:spcBef>
-                <a:spcPts val="1400"/>
-              </a:spcBef>
-              <a:defRPr sz="1600" b="1"/>
-            </a:pPr>
-            <a:r>
-              <a:t>Core Industry Drivers:</a:t>
-            </a:r>
-          </a:p>
-          <a:p>
-            <a:pPr>
-              <a:spcBef>
-                <a:spcPts val="400"/>
-              </a:spcBef>
-              <a:defRPr sz="1300">
-                <a:solidFill>
-                  <a:srgbClr val="475569"/>
-                </a:solidFill>
-              </a:defRPr>
-            </a:pPr>
-            <a:r>
-              <a:t>• Manual legacy inspection/decision methods incur high operational costs, delay, and human error.</a:t>
-            </a:r>
-          </a:p>
-          <a:p>
-            <a:pPr>
-              <a:spcBef>
-                <a:spcPts val="400"/>
-              </a:spcBef>
-              <a:defRPr sz="1300">
-                <a:solidFill>
-                  <a:srgbClr val="475569"/>
-                </a:solidFill>
-              </a:defRPr>
-            </a:pPr>
-            <a:r>
-              <a:t>• Scalable automated solutions require low-latency edge and cloud neural network inference.</a:t>
-            </a:r>
-          </a:p>
-          <a:p>
-            <a:pPr>
-              <a:spcBef>
-                <a:spcPts val="400"/>
-              </a:spcBef>
-              <a:defRPr sz="1300">
-                <a:solidFill>
-                  <a:srgbClr val="475569"/>
-                </a:solidFill>
-              </a:defRPr>
-            </a:pPr>
-            <a:r>
-              <a:t>• Explainable prediction confidence metrics are essential for operational trust and regulatory compliance.</a:t>
+          <a:solidFill>
+            <a:srgbClr val="0F172A"/>
+          </a:solidFill>
+          <a:ln>
+            <a:solidFill>
+              <a:srgbClr val="10B981"/>
+            </a:solidFill>
+          </a:ln>
+        </p:spPr>
+        <p:style>
+          <a:lnRef idx="1">
+            <a:schemeClr val="accent1"/>
+          </a:lnRef>
+          <a:fillRef idx="3">
+            <a:schemeClr val="accent1"/>
+          </a:fillRef>
+          <a:effectRef idx="2">
+            <a:schemeClr val="accent1"/>
+          </a:effectRef>
+          <a:fontRef idx="minor">
+            <a:schemeClr val="lt1"/>
+          </a:fontRef>
+        </p:style>
+        <p:txBody>
+          <a:bodyPr rtlCol="0" anchor="ctr" wrap="square"/>
+          <a:lstStyle/>
+          <a:p>
+            <a:pPr algn="ctr">
+              <a:defRPr sz="1600" b="1">
+                <a:solidFill>
+                  <a:srgbClr val="10B981"/>
+                </a:solidFill>
+              </a:defRPr>
+            </a:pPr>
+            <a:r>
+              <a:t>The Project-019 Enterprise Solution</a:t>
+            </a:r>
+          </a:p>
+          <a:p>
+            <a:pPr>
+              <a:defRPr sz="1200">
+                <a:solidFill>
+                  <a:srgbClr val="F8FAFC"/>
+                </a:solidFill>
+              </a:defRPr>
+            </a:pPr>
+            <a:r>
+              <a:t>✔ Deep Learning Multi-Horizon Forecasting: PyTorch Bi-LSTM captures temporal dynamics.</a:t>
+            </a:r>
+          </a:p>
+          <a:p>
+            <a:pPr>
+              <a:defRPr sz="1200">
+                <a:solidFill>
+                  <a:srgbClr val="F8FAFC"/>
+                </a:solidFill>
+              </a:defRPr>
+            </a:pPr>
+            <a:r>
+              <a:t>✔ Hybrid Ensemble Decisioning: Blends LSTM (40%), RF (30%), and GBM (30%) models.</a:t>
+            </a:r>
+          </a:p>
+          <a:p>
+            <a:pPr>
+              <a:defRPr sz="1200">
+                <a:solidFill>
+                  <a:srgbClr val="F8FAFC"/>
+                </a:solidFill>
+              </a:defRPr>
+            </a:pPr>
+            <a:r>
+              <a:t>✔ Dynamic Safety Stock &amp; ROP: Z=1.96 standard normal distribution achieves 98.5% service level.</a:t>
+            </a:r>
+          </a:p>
+          <a:p>
+            <a:pPr>
+              <a:defRPr sz="1200">
+                <a:solidFill>
+                  <a:srgbClr val="F8FAFC"/>
+                </a:solidFill>
+              </a:defRPr>
+            </a:pPr>
+            <a:r>
+              <a:t>✔ Economic Order Quantity (EOQ): Dynamically minimizes ordering vs carrying cost equilibrium.</a:t>
+            </a:r>
+          </a:p>
+          <a:p>
+            <a:pPr>
+              <a:defRPr sz="1200">
+                <a:solidFill>
+                  <a:srgbClr val="F8FAFC"/>
+                </a:solidFill>
+              </a:defRPr>
+            </a:pPr>
+            <a:r>
+              <a:t>✔ IoT &amp; Hardware Inward/Outward Gateway: Real-time laser barcode &amp; UHF RFID scanning.</a:t>
+            </a:r>
+          </a:p>
+          <a:p>
+            <a:pPr>
+              <a:defRPr sz="1200">
+                <a:solidFill>
+                  <a:srgbClr val="F8FAFC"/>
+                </a:solidFill>
+              </a:defRPr>
+            </a:pPr>
+            <a:r>
+              <a:t>✔ Shrinkage Telemetry: RS232 load-cell scale discrepancy validation identifies stock loss.</a:t>
             </a:r>
           </a:p>
         </p:txBody>
@@ -3444,16 +5430,108 @@
         <p:spPr>
           <a:xfrm>
             <a:off x="0" y="0"/>
-            <a:ext cx="12191695" cy="1097280"/>
+            <a:ext cx="12191695" cy="6858000"/>
           </a:xfrm>
           <a:prstGeom prst="rect">
+            <a:avLst/>
+          </a:prstGeom>
+          <a:solidFill>
+            <a:srgbClr val="090E17"/>
+          </a:solidFill>
+          <a:ln>
+            <a:noFill/>
+          </a:ln>
+        </p:spPr>
+        <p:style>
+          <a:lnRef idx="1">
+            <a:schemeClr val="accent1"/>
+          </a:lnRef>
+          <a:fillRef idx="3">
+            <a:schemeClr val="accent1"/>
+          </a:fillRef>
+          <a:effectRef idx="2">
+            <a:schemeClr val="accent1"/>
+          </a:effectRef>
+          <a:fontRef idx="minor">
+            <a:schemeClr val="lt1"/>
+          </a:fontRef>
+        </p:style>
+        <p:txBody>
+          <a:bodyPr rtlCol="0" anchor="ctr"/>
+          <a:lstStyle/>
+          <a:p>
+            <a:pPr algn="ctr"/>
+          </a:p>
+        </p:txBody>
+      </p:sp>
+      <p:sp>
+        <p:nvSpPr>
+          <p:cNvPr id="3" name="TextBox 2"/>
+          <p:cNvSpPr txBox="1"/>
+          <p:nvPr/>
+        </p:nvSpPr>
+        <p:spPr>
+          <a:xfrm>
+            <a:off x="731520" y="365760"/>
+            <a:ext cx="10728655" cy="1005840"/>
+          </a:xfrm>
+          <a:prstGeom prst="rect">
+            <a:avLst/>
+          </a:prstGeom>
+          <a:noFill/>
+        </p:spPr>
+        <p:txBody>
+          <a:bodyPr wrap="square">
+            <a:spAutoFit/>
+          </a:bodyPr>
+          <a:lstStyle/>
+          <a:p>
+            <a:pPr>
+              <a:defRPr sz="1100" b="1">
+                <a:solidFill>
+                  <a:srgbClr val="6366F1"/>
+                </a:solidFill>
+              </a:defRPr>
+            </a:pPr>
+            <a:r>
+              <a:t>ENTERPRISE IOT &amp; TIME-SERIES DEEP LEARNING • PROJECT-019</a:t>
+            </a:r>
+          </a:p>
+          <a:p>
+            <a:pPr>
+              <a:defRPr sz="2200" b="1">
+                <a:solidFill>
+                  <a:srgbClr val="F8FAFC"/>
+                </a:solidFill>
+              </a:defRPr>
+            </a:pPr>
+            <a:r>
+              <a:t>System Architecture &amp; Multi-Tier Topology</a:t>
+            </a:r>
+          </a:p>
+        </p:txBody>
+      </p:sp>
+      <p:sp>
+        <p:nvSpPr>
+          <p:cNvPr id="4" name="Rounded Rectangle 3"/>
+          <p:cNvSpPr/>
+          <p:nvPr/>
+        </p:nvSpPr>
+        <p:spPr>
+          <a:xfrm>
+            <a:off x="731520" y="1645920"/>
+            <a:ext cx="2468880" cy="4572000"/>
+          </a:xfrm>
+          <a:prstGeom prst="roundRect">
             <a:avLst/>
           </a:prstGeom>
           <a:solidFill>
             <a:srgbClr val="0F172A"/>
           </a:solidFill>
           <a:ln>
-            <a:noFill/>
+            <a:solidFill>
+              <a:srgbClr val="6366F1"/>
+            </a:solidFill>
           </a:ln>
         </p:spPr>
         <p:style>
@@ -3471,199 +5549,276 @@
           </a:fontRef>
         </p:style>
         <p:txBody>
-          <a:bodyPr rtlCol="0" anchor="ctr"/>
-          <a:lstStyle/>
-          <a:p>
-            <a:pPr algn="ctr"/>
-          </a:p>
-        </p:txBody>
-      </p:sp>
-      <p:sp>
-        <p:nvSpPr>
-          <p:cNvPr id="3" name="TextBox 2"/>
-          <p:cNvSpPr txBox="1"/>
+          <a:bodyPr rtlCol="0" anchor="ctr" wrap="square"/>
+          <a:lstStyle/>
+          <a:p>
+            <a:pPr algn="ctr">
+              <a:defRPr sz="1500" b="1">
+                <a:solidFill>
+                  <a:srgbClr val="6366F1"/>
+                </a:solidFill>
+              </a:defRPr>
+            </a:pPr>
+            <a:r>
+              <a:t>Presentation Layer</a:t>
+            </a:r>
+          </a:p>
+          <a:p>
+            <a:pPr>
+              <a:defRPr sz="1100">
+                <a:solidFill>
+                  <a:srgbClr val="F8FAFC"/>
+                </a:solidFill>
+              </a:defRPr>
+            </a:pPr>
+            <a:r>
+              <a:t>Interactive Dark Glassmorphism SPA</a:t>
+            </a:r>
+            <a:br/>
+            <a:r>
+              <a:t>HTML5/CSS3/Vanilla JS</a:t>
+            </a:r>
+            <a:br/>
+            <a:r>
+              <a:t>Canvas Sales Velocity Curve</a:t>
+            </a:r>
+            <a:br/>
+            <a:r>
+              <a:t>Live Telemetry Modal &amp; Beep Audio</a:t>
+            </a:r>
+          </a:p>
+        </p:txBody>
+      </p:sp>
+      <p:sp>
+        <p:nvSpPr>
+          <p:cNvPr id="5" name="Rounded Rectangle 4"/>
+          <p:cNvSpPr/>
           <p:nvPr/>
         </p:nvSpPr>
         <p:spPr>
           <a:xfrm>
-            <a:off x="731520" y="137160"/>
-            <a:ext cx="10698480" cy="822960"/>
-          </a:xfrm>
-          <a:prstGeom prst="rect">
+            <a:off x="3474720" y="1645920"/>
+            <a:ext cx="2468880" cy="4572000"/>
+          </a:xfrm>
+          <a:prstGeom prst="roundRect">
             <a:avLst/>
           </a:prstGeom>
-          <a:noFill/>
-        </p:spPr>
-        <p:txBody>
-          <a:bodyPr wrap="square">
-            <a:spAutoFit/>
-          </a:bodyPr>
-          <a:lstStyle/>
-          <a:p>
-            <a:pPr>
-              <a:defRPr sz="2400" b="1">
-                <a:solidFill>
-                  <a:srgbClr val="FFFFFF"/>
-                </a:solidFill>
-              </a:defRPr>
-            </a:pPr>
-            <a:r>
-              <a:t>2. Problem Statement &amp; Key Objectives</a:t>
+          <a:solidFill>
+            <a:srgbClr val="0F172A"/>
+          </a:solidFill>
+          <a:ln>
+            <a:solidFill>
+              <a:srgbClr val="A855F7"/>
+            </a:solidFill>
+          </a:ln>
+        </p:spPr>
+        <p:style>
+          <a:lnRef idx="1">
+            <a:schemeClr val="accent1"/>
+          </a:lnRef>
+          <a:fillRef idx="3">
+            <a:schemeClr val="accent1"/>
+          </a:fillRef>
+          <a:effectRef idx="2">
+            <a:schemeClr val="accent1"/>
+          </a:effectRef>
+          <a:fontRef idx="minor">
+            <a:schemeClr val="lt1"/>
+          </a:fontRef>
+        </p:style>
+        <p:txBody>
+          <a:bodyPr rtlCol="0" anchor="ctr" wrap="square"/>
+          <a:lstStyle/>
+          <a:p>
+            <a:pPr algn="ctr">
+              <a:defRPr sz="1500" b="1">
+                <a:solidFill>
+                  <a:srgbClr val="A855F7"/>
+                </a:solidFill>
+              </a:defRPr>
+            </a:pPr>
+            <a:r>
+              <a:t>Application &amp; API Layer</a:t>
             </a:r>
           </a:p>
           <a:p>
             <a:pPr>
               <a:defRPr sz="1100">
                 <a:solidFill>
-                  <a:srgbClr val="94A3B8"/>
-                </a:solidFill>
-              </a:defRPr>
-            </a:pPr>
-            <a:r>
-              <a:t>Academic &amp; Industrial AI Project Series  |  Project 19 of 55</a:t>
-            </a:r>
-          </a:p>
-        </p:txBody>
-      </p:sp>
-      <p:sp>
-        <p:nvSpPr>
-          <p:cNvPr id="4" name="TextBox 3"/>
-          <p:cNvSpPr txBox="1"/>
+                  <a:srgbClr val="F8FAFC"/>
+                </a:solidFill>
+              </a:defRPr>
+            </a:pPr>
+            <a:r>
+              <a:t>Python Flask 3.1 &amp; RESTful API</a:t>
+            </a:r>
+            <a:br/>
+            <a:r>
+              <a:t>CORS Middleware &amp; Port 5019</a:t>
+            </a:r>
+            <a:br/>
+            <a:r>
+              <a:t>Hardware Event Dispatcher</a:t>
+            </a:r>
+            <a:br/>
+            <a:r>
+              <a:t>Transactional DB Session Handling</a:t>
+            </a:r>
+          </a:p>
+        </p:txBody>
+      </p:sp>
+      <p:sp>
+        <p:nvSpPr>
+          <p:cNvPr id="6" name="Rounded Rectangle 5"/>
+          <p:cNvSpPr/>
           <p:nvPr/>
         </p:nvSpPr>
         <p:spPr>
           <a:xfrm>
-            <a:off x="731520" y="1371600"/>
-            <a:ext cx="10698480" cy="5029200"/>
-          </a:xfrm>
-          <a:prstGeom prst="rect">
+            <a:off x="6217920" y="1645920"/>
+            <a:ext cx="2468880" cy="4572000"/>
+          </a:xfrm>
+          <a:prstGeom prst="roundRect">
             <a:avLst/>
           </a:prstGeom>
-          <a:noFill/>
-        </p:spPr>
-        <p:txBody>
-          <a:bodyPr wrap="square">
-            <a:spAutoFit/>
-          </a:bodyPr>
-          <a:lstStyle/>
-          <a:p>
-            <a:pPr>
-              <a:spcBef>
-                <a:spcPts val="800"/>
-              </a:spcBef>
-              <a:defRPr sz="1600" b="1">
+          <a:solidFill>
+            <a:srgbClr val="0F172A"/>
+          </a:solidFill>
+          <a:ln>
+            <a:solidFill>
+              <a:srgbClr val="10B981"/>
+            </a:solidFill>
+          </a:ln>
+        </p:spPr>
+        <p:style>
+          <a:lnRef idx="1">
+            <a:schemeClr val="accent1"/>
+          </a:lnRef>
+          <a:fillRef idx="3">
+            <a:schemeClr val="accent1"/>
+          </a:fillRef>
+          <a:effectRef idx="2">
+            <a:schemeClr val="accent1"/>
+          </a:effectRef>
+          <a:fontRef idx="minor">
+            <a:schemeClr val="lt1"/>
+          </a:fontRef>
+        </p:style>
+        <p:txBody>
+          <a:bodyPr rtlCol="0" anchor="ctr" wrap="square"/>
+          <a:lstStyle/>
+          <a:p>
+            <a:pPr algn="ctr">
+              <a:defRPr sz="1500" b="1">
                 <a:solidFill>
                   <a:srgbClr val="10B981"/>
                 </a:solidFill>
               </a:defRPr>
             </a:pPr>
             <a:r>
-              <a:t>✓ Predictive Accuracy &amp; Generalization</a:t>
-            </a:r>
-          </a:p>
-          <a:p>
-            <a:pPr>
-              <a:spcBef>
-                <a:spcPts val="200"/>
-              </a:spcBef>
-              <a:defRPr sz="1300">
-                <a:solidFill>
-                  <a:srgbClr val="475569"/>
-                </a:solidFill>
-              </a:defRPr>
-            </a:pPr>
-            <a:r>
-              <a:t>Achieve high validation precision across diverse real-world operating distributions.</a:t>
-            </a:r>
-          </a:p>
-          <a:p>
-            <a:pPr>
-              <a:spcBef>
-                <a:spcPts val="800"/>
-              </a:spcBef>
-              <a:defRPr sz="1600" b="1">
-                <a:solidFill>
-                  <a:srgbClr val="10B981"/>
-                </a:solidFill>
-              </a:defRPr>
-            </a:pPr>
-            <a:r>
-              <a:t>✓ Real-Time Low Latency Inference</a:t>
-            </a:r>
-          </a:p>
-          <a:p>
-            <a:pPr>
-              <a:spcBef>
-                <a:spcPts val="200"/>
-              </a:spcBef>
-              <a:defRPr sz="1300">
-                <a:solidFill>
-                  <a:srgbClr val="475569"/>
-                </a:solidFill>
-              </a:defRPr>
-            </a:pPr>
-            <a:r>
-              <a:t>Deliver end-to-end processing response times under 35 milliseconds per query.</a:t>
-            </a:r>
-          </a:p>
-          <a:p>
-            <a:pPr>
-              <a:spcBef>
-                <a:spcPts val="800"/>
-              </a:spcBef>
-              <a:defRPr sz="1600" b="1">
-                <a:solidFill>
-                  <a:srgbClr val="10B981"/>
-                </a:solidFill>
-              </a:defRPr>
-            </a:pPr>
-            <a:r>
-              <a:t>✓ Robust Anomaly &amp; Boundary Handling</a:t>
-            </a:r>
-          </a:p>
-          <a:p>
-            <a:pPr>
-              <a:spcBef>
-                <a:spcPts val="200"/>
-              </a:spcBef>
-              <a:defRPr sz="1300">
-                <a:solidFill>
-                  <a:srgbClr val="475569"/>
-                </a:solidFill>
-              </a:defRPr>
-            </a:pPr>
-            <a:r>
-              <a:t>Detect out-of-distribution instances and reject anomalous inputs with deterministic alerts.</a:t>
-            </a:r>
-          </a:p>
-          <a:p>
-            <a:pPr>
-              <a:spcBef>
-                <a:spcPts val="800"/>
-              </a:spcBef>
-              <a:defRPr sz="1600" b="1">
-                <a:solidFill>
-                  <a:srgbClr val="10B981"/>
-                </a:solidFill>
-              </a:defRPr>
-            </a:pPr>
-            <a:r>
-              <a:t>✓ Production-Ready Full Stack</a:t>
-            </a:r>
-          </a:p>
-          <a:p>
-            <a:pPr>
-              <a:spcBef>
-                <a:spcPts val="200"/>
-              </a:spcBef>
-              <a:defRPr sz="1300">
-                <a:solidFill>
-                  <a:srgbClr val="475569"/>
-                </a:solidFill>
-              </a:defRPr>
-            </a:pPr>
-            <a:r>
-              <a:t>Provide modular REST APIs, audit logging, and responsive user interfaces.</a:t>
+              <a:t>AI &amp; Neural Engine</a:t>
+            </a:r>
+          </a:p>
+          <a:p>
+            <a:pPr>
+              <a:defRPr sz="1100">
+                <a:solidFill>
+                  <a:srgbClr val="F8FAFC"/>
+                </a:solidFill>
+              </a:defRPr>
+            </a:pPr>
+            <a:r>
+              <a:t>PyTorch Bi-Directional LSTM</a:t>
+            </a:r>
+            <a:br/>
+            <a:r>
+              <a:t>Scikit-Learn Random Forest &amp; GBM</a:t>
+            </a:r>
+            <a:br/>
+            <a:r>
+              <a:t>StandardScaler Lag Transformation</a:t>
+            </a:r>
+            <a:br/>
+            <a:r>
+              <a:t>Dynamic ROP &amp; EOQ Optimizers</a:t>
+            </a:r>
+          </a:p>
+        </p:txBody>
+      </p:sp>
+      <p:sp>
+        <p:nvSpPr>
+          <p:cNvPr id="7" name="Rounded Rectangle 6"/>
+          <p:cNvSpPr/>
+          <p:nvPr/>
+        </p:nvSpPr>
+        <p:spPr>
+          <a:xfrm>
+            <a:off x="8961120" y="1645920"/>
+            <a:ext cx="2468880" cy="4572000"/>
+          </a:xfrm>
+          <a:prstGeom prst="roundRect">
+            <a:avLst/>
+          </a:prstGeom>
+          <a:solidFill>
+            <a:srgbClr val="0F172A"/>
+          </a:solidFill>
+          <a:ln>
+            <a:solidFill>
+              <a:srgbClr val="06B6D4"/>
+            </a:solidFill>
+          </a:ln>
+        </p:spPr>
+        <p:style>
+          <a:lnRef idx="1">
+            <a:schemeClr val="accent1"/>
+          </a:lnRef>
+          <a:fillRef idx="3">
+            <a:schemeClr val="accent1"/>
+          </a:fillRef>
+          <a:effectRef idx="2">
+            <a:schemeClr val="accent1"/>
+          </a:effectRef>
+          <a:fontRef idx="minor">
+            <a:schemeClr val="lt1"/>
+          </a:fontRef>
+        </p:style>
+        <p:txBody>
+          <a:bodyPr rtlCol="0" anchor="ctr" wrap="square"/>
+          <a:lstStyle/>
+          <a:p>
+            <a:pPr algn="ctr">
+              <a:defRPr sz="1500" b="1">
+                <a:solidFill>
+                  <a:srgbClr val="06B6D4"/>
+                </a:solidFill>
+              </a:defRPr>
+            </a:pPr>
+            <a:r>
+              <a:t>Data &amp; Hardware Layer</a:t>
+            </a:r>
+          </a:p>
+          <a:p>
+            <a:pPr>
+              <a:defRPr sz="1100">
+                <a:solidFill>
+                  <a:srgbClr val="F8FAFC"/>
+                </a:solidFill>
+              </a:defRPr>
+            </a:pPr>
+            <a:r>
+              <a:t>Relational SQLite &amp; MySQL Engine</a:t>
+            </a:r>
+            <a:br/>
+            <a:r>
+              <a:t>9 Relational Tables (ACID)</a:t>
+            </a:r>
+            <a:br/>
+            <a:r>
+              <a:t>Laser Barcode &amp; UHF RFID archways</a:t>
+            </a:r>
+            <a:br/>
+            <a:r>
+              <a:t>Smart Load-Cell RS232 Scales</a:t>
             </a:r>
           </a:p>
         </p:txBody>
@@ -3695,16 +5850,132 @@
         <p:spPr>
           <a:xfrm>
             <a:off x="0" y="0"/>
-            <a:ext cx="12191695" cy="1097280"/>
+            <a:ext cx="12191695" cy="6858000"/>
           </a:xfrm>
           <a:prstGeom prst="rect">
+            <a:avLst/>
+          </a:prstGeom>
+          <a:solidFill>
+            <a:srgbClr val="090E17"/>
+          </a:solidFill>
+          <a:ln>
+            <a:noFill/>
+          </a:ln>
+        </p:spPr>
+        <p:style>
+          <a:lnRef idx="1">
+            <a:schemeClr val="accent1"/>
+          </a:lnRef>
+          <a:fillRef idx="3">
+            <a:schemeClr val="accent1"/>
+          </a:fillRef>
+          <a:effectRef idx="2">
+            <a:schemeClr val="accent1"/>
+          </a:effectRef>
+          <a:fontRef idx="minor">
+            <a:schemeClr val="lt1"/>
+          </a:fontRef>
+        </p:style>
+        <p:txBody>
+          <a:bodyPr rtlCol="0" anchor="ctr"/>
+          <a:lstStyle/>
+          <a:p>
+            <a:pPr algn="ctr"/>
+          </a:p>
+        </p:txBody>
+      </p:sp>
+      <p:sp>
+        <p:nvSpPr>
+          <p:cNvPr id="3" name="TextBox 2"/>
+          <p:cNvSpPr txBox="1"/>
+          <p:nvPr/>
+        </p:nvSpPr>
+        <p:spPr>
+          <a:xfrm>
+            <a:off x="731520" y="365760"/>
+            <a:ext cx="10728655" cy="1005840"/>
+          </a:xfrm>
+          <a:prstGeom prst="rect">
+            <a:avLst/>
+          </a:prstGeom>
+          <a:noFill/>
+        </p:spPr>
+        <p:txBody>
+          <a:bodyPr wrap="square">
+            <a:spAutoFit/>
+          </a:bodyPr>
+          <a:lstStyle/>
+          <a:p>
+            <a:pPr>
+              <a:defRPr sz="1100" b="1">
+                <a:solidFill>
+                  <a:srgbClr val="6366F1"/>
+                </a:solidFill>
+              </a:defRPr>
+            </a:pPr>
+            <a:r>
+              <a:t>WAREHOUSE OPERATIONS</a:t>
+            </a:r>
+          </a:p>
+          <a:p>
+            <a:pPr>
+              <a:defRPr sz="2200" b="1">
+                <a:solidFill>
+                  <a:srgbClr val="F8FAFC"/>
+                </a:solidFill>
+              </a:defRPr>
+            </a:pPr>
+            <a:r>
+              <a:t>Real-Time Warehouse Ledger &amp; Asset Valuation</a:t>
+            </a:r>
+          </a:p>
+        </p:txBody>
+      </p:sp>
+      <p:pic>
+        <p:nvPicPr>
+          <p:cNvPr id="4" name="Picture 3" descr="01_inventory_dashboard_ledger.png"/>
+          <p:cNvPicPr>
+            <a:picLocks noChangeAspect="1"/>
+          </p:cNvPicPr>
+          <p:nvPr/>
+        </p:nvPicPr>
+        <p:blipFill>
+          <a:blip r:embed="rId2"/>
+          <a:stretch>
+            <a:fillRect/>
+          </a:stretch>
+        </p:blipFill>
+        <p:spPr>
+          <a:xfrm>
+            <a:off x="731520" y="1645920"/>
+            <a:ext cx="6949440" cy="4343400"/>
+          </a:xfrm>
+          <a:prstGeom prst="rect">
+            <a:avLst/>
+          </a:prstGeom>
+        </p:spPr>
+      </p:pic>
+      <p:sp>
+        <p:nvSpPr>
+          <p:cNvPr id="5" name="Rounded Rectangle 4"/>
+          <p:cNvSpPr/>
+          <p:nvPr/>
+        </p:nvSpPr>
+        <p:spPr>
+          <a:xfrm>
+            <a:off x="7955279" y="1645920"/>
+            <a:ext cx="3474720" cy="4572000"/>
+          </a:xfrm>
+          <a:prstGeom prst="roundRect">
             <a:avLst/>
           </a:prstGeom>
           <a:solidFill>
             <a:srgbClr val="0F172A"/>
           </a:solidFill>
           <a:ln>
-            <a:noFill/>
+            <a:solidFill>
+              <a:srgbClr val="6366F1"/>
+            </a:solidFill>
           </a:ln>
         </p:spPr>
         <p:style>
@@ -3722,214 +5993,78 @@
           </a:fontRef>
         </p:style>
         <p:txBody>
-          <a:bodyPr rtlCol="0" anchor="ctr"/>
-          <a:lstStyle/>
-          <a:p>
-            <a:pPr algn="ctr"/>
-          </a:p>
-        </p:txBody>
-      </p:sp>
-      <p:sp>
-        <p:nvSpPr>
-          <p:cNvPr id="3" name="TextBox 2"/>
-          <p:cNvSpPr txBox="1"/>
-          <p:nvPr/>
-        </p:nvSpPr>
-        <p:spPr>
-          <a:xfrm>
-            <a:off x="731520" y="137160"/>
-            <a:ext cx="10698480" cy="822960"/>
-          </a:xfrm>
-          <a:prstGeom prst="rect">
-            <a:avLst/>
-          </a:prstGeom>
-          <a:noFill/>
-        </p:spPr>
-        <p:txBody>
-          <a:bodyPr wrap="square">
-            <a:spAutoFit/>
-          </a:bodyPr>
-          <a:lstStyle/>
-          <a:p>
-            <a:pPr>
-              <a:defRPr sz="2400" b="1">
-                <a:solidFill>
-                  <a:srgbClr val="FFFFFF"/>
-                </a:solidFill>
-              </a:defRPr>
-            </a:pPr>
-            <a:r>
-              <a:t>3. System Architecture &amp; Workflow Pipeline</a:t>
-            </a:r>
-          </a:p>
-          <a:p>
-            <a:pPr>
-              <a:defRPr sz="1100">
+          <a:bodyPr rtlCol="0" anchor="ctr" wrap="square"/>
+          <a:lstStyle/>
+          <a:p>
+            <a:pPr algn="ctr">
+              <a:defRPr sz="1600" b="1">
+                <a:solidFill>
+                  <a:srgbClr val="6366F1"/>
+                </a:solidFill>
+              </a:defRPr>
+            </a:pPr>
+            <a:r>
+              <a:t>Operational Capabilities</a:t>
+            </a:r>
+          </a:p>
+          <a:p>
+            <a:pPr>
+              <a:defRPr sz="1150">
                 <a:solidFill>
                   <a:srgbClr val="94A3B8"/>
                 </a:solidFill>
               </a:defRPr>
             </a:pPr>
             <a:r>
-              <a:t>Academic &amp; Industrial AI Project Series  |  Project 19 of 55</a:t>
-            </a:r>
-          </a:p>
-        </p:txBody>
-      </p:sp>
-      <p:sp>
-        <p:nvSpPr>
-          <p:cNvPr id="4" name="TextBox 3"/>
-          <p:cNvSpPr txBox="1"/>
-          <p:nvPr/>
-        </p:nvSpPr>
-        <p:spPr>
-          <a:xfrm>
-            <a:off x="731520" y="1371600"/>
-            <a:ext cx="10698480" cy="5029200"/>
-          </a:xfrm>
-          <a:prstGeom prst="rect">
-            <a:avLst/>
-          </a:prstGeom>
-          <a:noFill/>
-        </p:spPr>
-        <p:txBody>
-          <a:bodyPr wrap="square">
-            <a:spAutoFit/>
-          </a:bodyPr>
-          <a:lstStyle/>
-          <a:p>
-            <a:pPr>
-              <a:spcBef>
-                <a:spcPts val="800"/>
-              </a:spcBef>
-              <a:defRPr sz="1500" b="1">
-                <a:solidFill>
-                  <a:srgbClr val="2563EB"/>
-                </a:solidFill>
-              </a:defRPr>
-            </a:pPr>
-            <a:r>
-              <a:t>[1] Ingestion Layer</a:t>
-            </a:r>
-          </a:p>
-          <a:p>
-            <a:pPr>
-              <a:defRPr sz="1300">
-                <a:solidFill>
-                  <a:srgbClr val="475569"/>
-                </a:solidFill>
-              </a:defRPr>
-            </a:pPr>
-            <a:r>
-              <a:t>Raw telemetry, video feeds, or structured tabular features ingested via secure endpoints.</a:t>
-            </a:r>
-          </a:p>
-          <a:p>
-            <a:pPr>
-              <a:spcBef>
-                <a:spcPts val="800"/>
-              </a:spcBef>
-              <a:defRPr sz="1500" b="1">
-                <a:solidFill>
-                  <a:srgbClr val="2563EB"/>
-                </a:solidFill>
-              </a:defRPr>
-            </a:pPr>
-            <a:r>
-              <a:t>[2] Preprocessing &amp; Normalization</a:t>
-            </a:r>
-          </a:p>
-          <a:p>
-            <a:pPr>
-              <a:defRPr sz="1300">
-                <a:solidFill>
-                  <a:srgbClr val="475569"/>
-                </a:solidFill>
-              </a:defRPr>
-            </a:pPr>
-            <a:r>
-              <a:t>Feature scaling, missing value imputation, winsorization, and tensor reshaping.</a:t>
-            </a:r>
-          </a:p>
-          <a:p>
-            <a:pPr>
-              <a:spcBef>
-                <a:spcPts val="800"/>
-              </a:spcBef>
-              <a:defRPr sz="1500" b="1">
-                <a:solidFill>
-                  <a:srgbClr val="2563EB"/>
-                </a:solidFill>
-              </a:defRPr>
-            </a:pPr>
-            <a:r>
-              <a:t>[3] Deep Neural Inference Engine</a:t>
-            </a:r>
-          </a:p>
-          <a:p>
-            <a:pPr>
-              <a:defRPr sz="1300">
-                <a:solidFill>
-                  <a:srgbClr val="475569"/>
-                </a:solidFill>
-              </a:defRPr>
-            </a:pPr>
-            <a:r>
-              <a:t>Optimized model evaluating representations with GPU/MPS/CPU acceleration.</a:t>
-            </a:r>
-          </a:p>
-          <a:p>
-            <a:pPr>
-              <a:spcBef>
-                <a:spcPts val="800"/>
-              </a:spcBef>
-              <a:defRPr sz="1500" b="1">
-                <a:solidFill>
-                  <a:srgbClr val="2563EB"/>
-                </a:solidFill>
-              </a:defRPr>
-            </a:pPr>
-            <a:r>
-              <a:t>[4] Post-Processing &amp; Decision Support</a:t>
-            </a:r>
-          </a:p>
-          <a:p>
-            <a:pPr>
-              <a:defRPr sz="1300">
-                <a:solidFill>
-                  <a:srgbClr val="475569"/>
-                </a:solidFill>
-              </a:defRPr>
-            </a:pPr>
-            <a:r>
-              <a:t>Threshold calibration, confidence scoring, classification/regression output formatting.</a:t>
-            </a:r>
-          </a:p>
-          <a:p>
-            <a:pPr>
-              <a:spcBef>
-                <a:spcPts val="800"/>
-              </a:spcBef>
-              <a:defRPr sz="1500" b="1">
-                <a:solidFill>
-                  <a:srgbClr val="2563EB"/>
-                </a:solidFill>
-              </a:defRPr>
-            </a:pPr>
-            <a:r>
-              <a:t>[5] Visualization &amp; Persistence</a:t>
-            </a:r>
-          </a:p>
-          <a:p>
-            <a:pPr>
-              <a:defRPr sz="1300">
-                <a:solidFill>
-                  <a:srgbClr val="475569"/>
-                </a:solidFill>
-              </a:defRPr>
-            </a:pPr>
-            <a:r>
-              <a:t>Interactive UI dashboard rendering metrics and SQLite/PostgreSQL audit logging.</a:t>
+              <a:t>• Real-Time Valuation: Dynamic inventory evaluation based on retail and cost margin pricing.</a:t>
+            </a:r>
+          </a:p>
+          <a:p>
+            <a:pPr>
+              <a:defRPr sz="1150">
+                <a:solidFill>
+                  <a:srgbClr val="94A3B8"/>
+                </a:solidFill>
+              </a:defRPr>
+            </a:pPr>
+            <a:r>
+              <a:t>• Automated POS Outflow: Live deduction of units with timestamped sales transaction logging.</a:t>
+            </a:r>
+          </a:p>
+          <a:p>
+            <a:pPr>
+              <a:defRPr sz="1150">
+                <a:solidFill>
+                  <a:srgbClr val="94A3B8"/>
+                </a:solidFill>
+              </a:defRPr>
+            </a:pPr>
+            <a:r>
+              <a:t>• Aisle Location Tracking: Tracks bin and aisle mapping (e.g. Aisle A-01, B-04).</a:t>
+            </a:r>
+          </a:p>
+          <a:p>
+            <a:pPr>
+              <a:defRPr sz="1150">
+                <a:solidFill>
+                  <a:srgbClr val="94A3B8"/>
+                </a:solidFill>
+              </a:defRPr>
+            </a:pPr>
+            <a:r>
+              <a:t>• Stock Status Indicators: Green (Healthy), Amber (Low Stock), Red (Stockout).</a:t>
+            </a:r>
+          </a:p>
+          <a:p>
+            <a:pPr>
+              <a:defRPr sz="1150">
+                <a:solidFill>
+                  <a:srgbClr val="94A3B8"/>
+                </a:solidFill>
+              </a:defRPr>
+            </a:pPr>
+            <a:r>
+              <a:t>• Quick Restock Intake: Immediate warehouse bulk inwards processing.</a:t>
             </a:r>
           </a:p>
         </p:txBody>
@@ -3961,16 +6096,132 @@
         <p:spPr>
           <a:xfrm>
             <a:off x="0" y="0"/>
-            <a:ext cx="12191695" cy="1097280"/>
+            <a:ext cx="12191695" cy="6858000"/>
           </a:xfrm>
           <a:prstGeom prst="rect">
+            <a:avLst/>
+          </a:prstGeom>
+          <a:solidFill>
+            <a:srgbClr val="090E17"/>
+          </a:solidFill>
+          <a:ln>
+            <a:noFill/>
+          </a:ln>
+        </p:spPr>
+        <p:style>
+          <a:lnRef idx="1">
+            <a:schemeClr val="accent1"/>
+          </a:lnRef>
+          <a:fillRef idx="3">
+            <a:schemeClr val="accent1"/>
+          </a:fillRef>
+          <a:effectRef idx="2">
+            <a:schemeClr val="accent1"/>
+          </a:effectRef>
+          <a:fontRef idx="minor">
+            <a:schemeClr val="lt1"/>
+          </a:fontRef>
+        </p:style>
+        <p:txBody>
+          <a:bodyPr rtlCol="0" anchor="ctr"/>
+          <a:lstStyle/>
+          <a:p>
+            <a:pPr algn="ctr"/>
+          </a:p>
+        </p:txBody>
+      </p:sp>
+      <p:sp>
+        <p:nvSpPr>
+          <p:cNvPr id="3" name="TextBox 2"/>
+          <p:cNvSpPr txBox="1"/>
+          <p:nvPr/>
+        </p:nvSpPr>
+        <p:spPr>
+          <a:xfrm>
+            <a:off x="731520" y="365760"/>
+            <a:ext cx="10728655" cy="1005840"/>
+          </a:xfrm>
+          <a:prstGeom prst="rect">
+            <a:avLst/>
+          </a:prstGeom>
+          <a:noFill/>
+        </p:spPr>
+        <p:txBody>
+          <a:bodyPr wrap="square">
+            <a:spAutoFit/>
+          </a:bodyPr>
+          <a:lstStyle/>
+          <a:p>
+            <a:pPr>
+              <a:defRPr sz="1100" b="1">
+                <a:solidFill>
+                  <a:srgbClr val="6366F1"/>
+                </a:solidFill>
+              </a:defRPr>
+            </a:pPr>
+            <a:r>
+              <a:t>IOT TELEMETRY &amp; HARDWARE INTEGRATION</a:t>
+            </a:r>
+          </a:p>
+          <a:p>
+            <a:pPr>
+              <a:defRPr sz="2200" b="1">
+                <a:solidFill>
+                  <a:srgbClr val="F8FAFC"/>
+                </a:solidFill>
+              </a:defRPr>
+            </a:pPr>
+            <a:r>
+              <a:t>IoT Hardware Simulator: Laser Barcode &amp; UHF RFID Gate</a:t>
+            </a:r>
+          </a:p>
+        </p:txBody>
+      </p:sp>
+      <p:pic>
+        <p:nvPicPr>
+          <p:cNvPr id="4" name="Picture 3" descr="02_hardware_barcode_rfid_terminal.png"/>
+          <p:cNvPicPr>
+            <a:picLocks noChangeAspect="1"/>
+          </p:cNvPicPr>
+          <p:nvPr/>
+        </p:nvPicPr>
+        <p:blipFill>
+          <a:blip r:embed="rId2"/>
+          <a:stretch>
+            <a:fillRect/>
+          </a:stretch>
+        </p:blipFill>
+        <p:spPr>
+          <a:xfrm>
+            <a:off x="731520" y="1645920"/>
+            <a:ext cx="6949440" cy="4343400"/>
+          </a:xfrm>
+          <a:prstGeom prst="rect">
+            <a:avLst/>
+          </a:prstGeom>
+        </p:spPr>
+      </p:pic>
+      <p:sp>
+        <p:nvSpPr>
+          <p:cNvPr id="5" name="Rounded Rectangle 4"/>
+          <p:cNvSpPr/>
+          <p:nvPr/>
+        </p:nvSpPr>
+        <p:spPr>
+          <a:xfrm>
+            <a:off x="7955279" y="1645920"/>
+            <a:ext cx="3474720" cy="4572000"/>
+          </a:xfrm>
+          <a:prstGeom prst="roundRect">
             <a:avLst/>
           </a:prstGeom>
           <a:solidFill>
             <a:srgbClr val="0F172A"/>
           </a:solidFill>
           <a:ln>
-            <a:noFill/>
+            <a:solidFill>
+              <a:srgbClr val="10B981"/>
+            </a:solidFill>
           </a:ln>
         </p:spPr>
         <p:style>
@@ -3988,187 +6239,78 @@
           </a:fontRef>
         </p:style>
         <p:txBody>
-          <a:bodyPr rtlCol="0" anchor="ctr"/>
-          <a:lstStyle/>
-          <a:p>
-            <a:pPr algn="ctr"/>
-          </a:p>
-        </p:txBody>
-      </p:sp>
-      <p:sp>
-        <p:nvSpPr>
-          <p:cNvPr id="3" name="TextBox 2"/>
-          <p:cNvSpPr txBox="1"/>
-          <p:nvPr/>
-        </p:nvSpPr>
-        <p:spPr>
-          <a:xfrm>
-            <a:off x="731520" y="137160"/>
-            <a:ext cx="10698480" cy="822960"/>
-          </a:xfrm>
-          <a:prstGeom prst="rect">
-            <a:avLst/>
-          </a:prstGeom>
-          <a:noFill/>
-        </p:spPr>
-        <p:txBody>
-          <a:bodyPr wrap="square">
-            <a:spAutoFit/>
-          </a:bodyPr>
-          <a:lstStyle/>
-          <a:p>
-            <a:pPr>
-              <a:defRPr sz="2400" b="1">
-                <a:solidFill>
-                  <a:srgbClr val="FFFFFF"/>
-                </a:solidFill>
-              </a:defRPr>
-            </a:pPr>
-            <a:r>
-              <a:t>4. Deep Learning &amp; ML Methodology</a:t>
-            </a:r>
-          </a:p>
-          <a:p>
-            <a:pPr>
-              <a:defRPr sz="1100">
+          <a:bodyPr rtlCol="0" anchor="ctr" wrap="square"/>
+          <a:lstStyle/>
+          <a:p>
+            <a:pPr algn="ctr">
+              <a:defRPr sz="1600" b="1">
+                <a:solidFill>
+                  <a:srgbClr val="10B981"/>
+                </a:solidFill>
+              </a:defRPr>
+            </a:pPr>
+            <a:r>
+              <a:t>Hardware Features</a:t>
+            </a:r>
+          </a:p>
+          <a:p>
+            <a:pPr>
+              <a:defRPr sz="1150">
                 <a:solidFill>
                   <a:srgbClr val="94A3B8"/>
                 </a:solidFill>
               </a:defRPr>
             </a:pPr>
             <a:r>
-              <a:t>Academic &amp; Industrial AI Project Series  |  Project 19 of 55</a:t>
-            </a:r>
-          </a:p>
-        </p:txBody>
-      </p:sp>
-      <p:sp>
-        <p:nvSpPr>
-          <p:cNvPr id="4" name="TextBox 3"/>
-          <p:cNvSpPr txBox="1"/>
-          <p:nvPr/>
-        </p:nvSpPr>
-        <p:spPr>
-          <a:xfrm>
-            <a:off x="731520" y="1371600"/>
-            <a:ext cx="10698480" cy="5029200"/>
-          </a:xfrm>
-          <a:prstGeom prst="rect">
-            <a:avLst/>
-          </a:prstGeom>
-          <a:noFill/>
-        </p:spPr>
-        <p:txBody>
-          <a:bodyPr wrap="square">
-            <a:spAutoFit/>
-          </a:bodyPr>
-          <a:lstStyle/>
-          <a:p>
-            <a:pPr>
-              <a:spcBef>
-                <a:spcPts val="800"/>
-              </a:spcBef>
-              <a:defRPr sz="1500" b="1">
-                <a:solidFill>
-                  <a:srgbClr val="0F172A"/>
-                </a:solidFill>
-              </a:defRPr>
-            </a:pPr>
-            <a:r>
-              <a:t>• Feature Engineering &amp; Dimensionality Alignment</a:t>
-            </a:r>
-          </a:p>
-          <a:p>
-            <a:pPr>
-              <a:defRPr sz="1300">
-                <a:solidFill>
-                  <a:srgbClr val="475569"/>
-                </a:solidFill>
-              </a:defRPr>
-            </a:pPr>
-            <a:r>
-              <a:t>Domain-specific feature extraction, temporal windowing, and embedding vectors.</a:t>
-            </a:r>
-          </a:p>
-          <a:p>
-            <a:pPr>
-              <a:spcBef>
-                <a:spcPts val="800"/>
-              </a:spcBef>
-              <a:defRPr sz="1500" b="1">
-                <a:solidFill>
-                  <a:srgbClr val="0F172A"/>
-                </a:solidFill>
-              </a:defRPr>
-            </a:pPr>
-            <a:r>
-              <a:t>• Model Family &amp; Optimization</a:t>
-            </a:r>
-          </a:p>
-          <a:p>
-            <a:pPr>
-              <a:defRPr sz="1300">
-                <a:solidFill>
-                  <a:srgbClr val="475569"/>
-                </a:solidFill>
-              </a:defRPr>
-            </a:pPr>
-            <a:r>
-              <a:t>Ensemble gradient boosting or deep neural networks trained with AdamW and adaptive LR scheduling.</a:t>
-            </a:r>
-          </a:p>
-          <a:p>
-            <a:pPr>
-              <a:spcBef>
-                <a:spcPts val="800"/>
-              </a:spcBef>
-              <a:defRPr sz="1500" b="1">
-                <a:solidFill>
-                  <a:srgbClr val="0F172A"/>
-                </a:solidFill>
-              </a:defRPr>
-            </a:pPr>
-            <a:r>
-              <a:t>• Overfitting Mitigation</a:t>
-            </a:r>
-          </a:p>
-          <a:p>
-            <a:pPr>
-              <a:defRPr sz="1300">
-                <a:solidFill>
-                  <a:srgbClr val="475569"/>
-                </a:solidFill>
-              </a:defRPr>
-            </a:pPr>
-            <a:r>
-              <a:t>Stratified k-fold cross-validation, dropout layers, early stopping, and data augmentation.</a:t>
-            </a:r>
-          </a:p>
-          <a:p>
-            <a:pPr>
-              <a:spcBef>
-                <a:spcPts val="800"/>
-              </a:spcBef>
-              <a:defRPr sz="1500" b="1">
-                <a:solidFill>
-                  <a:srgbClr val="0F172A"/>
-                </a:solidFill>
-              </a:defRPr>
-            </a:pPr>
-            <a:r>
-              <a:t>• Explainability &amp; Auditability</a:t>
-            </a:r>
-          </a:p>
-          <a:p>
-            <a:pPr>
-              <a:defRPr sz="1300">
-                <a:solidFill>
-                  <a:srgbClr val="475569"/>
-                </a:solidFill>
-              </a:defRPr>
-            </a:pPr>
-            <a:r>
-              <a:t>Confidence scores and feature importance attributions for high-stakes decisions.</a:t>
+              <a:t>• Multi-Protocol Scanner: Emulates Handheld 1D/2D Barcode Lasers and UHF RFID Gates.</a:t>
+            </a:r>
+          </a:p>
+          <a:p>
+            <a:pPr>
+              <a:defRPr sz="1150">
+                <a:solidFill>
+                  <a:srgbClr val="94A3B8"/>
+                </a:solidFill>
+              </a:defRPr>
+            </a:pPr>
+            <a:r>
+              <a:t>• Interactive Preset Scans: Instant click-to-scan buttons for rapid operator testing.</a:t>
+            </a:r>
+          </a:p>
+          <a:p>
+            <a:pPr>
+              <a:defRPr sz="1150">
+                <a:solidFill>
+                  <a:srgbClr val="94A3B8"/>
+                </a:solidFill>
+              </a:defRPr>
+            </a:pPr>
+            <a:r>
+              <a:t>• Tri-Mode Action Dispatch: Supports LOOKUP (inventory query), SALE (auto-checkout), and INWARD (+10 intake).</a:t>
+            </a:r>
+          </a:p>
+          <a:p>
+            <a:pPr>
+              <a:defRPr sz="1150">
+                <a:solidFill>
+                  <a:srgbClr val="94A3B8"/>
+                </a:solidFill>
+              </a:defRPr>
+            </a:pPr>
+            <a:r>
+              <a:t>• Synthesized Laser Beep: HTML5 AudioContext oscillator simulates real physical terminal sound.</a:t>
+            </a:r>
+          </a:p>
+          <a:p>
+            <a:pPr>
+              <a:defRPr sz="1150">
+                <a:solidFill>
+                  <a:srgbClr val="94A3B8"/>
+                </a:solidFill>
+              </a:defRPr>
+            </a:pPr>
+            <a:r>
+              <a:t>• Device Source Attribution: Logs scanner ID (e.g. SCANNER-W01, RFID-GATE-01) with each movement.</a:t>
             </a:r>
           </a:p>
         </p:txBody>
@@ -4200,16 +6342,108 @@
         <p:spPr>
           <a:xfrm>
             <a:off x="0" y="0"/>
-            <a:ext cx="12191695" cy="1097280"/>
+            <a:ext cx="12191695" cy="6858000"/>
           </a:xfrm>
           <a:prstGeom prst="rect">
+            <a:avLst/>
+          </a:prstGeom>
+          <a:solidFill>
+            <a:srgbClr val="090E17"/>
+          </a:solidFill>
+          <a:ln>
+            <a:noFill/>
+          </a:ln>
+        </p:spPr>
+        <p:style>
+          <a:lnRef idx="1">
+            <a:schemeClr val="accent1"/>
+          </a:lnRef>
+          <a:fillRef idx="3">
+            <a:schemeClr val="accent1"/>
+          </a:fillRef>
+          <a:effectRef idx="2">
+            <a:schemeClr val="accent1"/>
+          </a:effectRef>
+          <a:fontRef idx="minor">
+            <a:schemeClr val="lt1"/>
+          </a:fontRef>
+        </p:style>
+        <p:txBody>
+          <a:bodyPr rtlCol="0" anchor="ctr"/>
+          <a:lstStyle/>
+          <a:p>
+            <a:pPr algn="ctr"/>
+          </a:p>
+        </p:txBody>
+      </p:sp>
+      <p:sp>
+        <p:nvSpPr>
+          <p:cNvPr id="3" name="TextBox 2"/>
+          <p:cNvSpPr txBox="1"/>
+          <p:nvPr/>
+        </p:nvSpPr>
+        <p:spPr>
+          <a:xfrm>
+            <a:off x="731520" y="365760"/>
+            <a:ext cx="10728655" cy="1005840"/>
+          </a:xfrm>
+          <a:prstGeom prst="rect">
+            <a:avLst/>
+          </a:prstGeom>
+          <a:noFill/>
+        </p:spPr>
+        <p:txBody>
+          <a:bodyPr wrap="square">
+            <a:spAutoFit/>
+          </a:bodyPr>
+          <a:lstStyle/>
+          <a:p>
+            <a:pPr>
+              <a:defRPr sz="1100" b="1">
+                <a:solidFill>
+                  <a:srgbClr val="6366F1"/>
+                </a:solidFill>
+              </a:defRPr>
+            </a:pPr>
+            <a:r>
+              <a:t>IOT INDUSTRIAL SENSORS</a:t>
+            </a:r>
+          </a:p>
+          <a:p>
+            <a:pPr>
+              <a:defRPr sz="2200" b="1">
+                <a:solidFill>
+                  <a:srgbClr val="F8FAFC"/>
+                </a:solidFill>
+              </a:defRPr>
+            </a:pPr>
+            <a:r>
+              <a:t>Load-Cell Weighing Shelf Telemetry &amp; Shrinkage Forensics</a:t>
+            </a:r>
+          </a:p>
+        </p:txBody>
+      </p:sp>
+      <p:sp>
+        <p:nvSpPr>
+          <p:cNvPr id="4" name="Rounded Rectangle 3"/>
+          <p:cNvSpPr/>
+          <p:nvPr/>
+        </p:nvSpPr>
+        <p:spPr>
+          <a:xfrm>
+            <a:off x="731520" y="1645920"/>
+            <a:ext cx="5120640" cy="4572000"/>
+          </a:xfrm>
+          <a:prstGeom prst="roundRect">
             <a:avLst/>
           </a:prstGeom>
           <a:solidFill>
             <a:srgbClr val="0F172A"/>
           </a:solidFill>
           <a:ln>
-            <a:noFill/>
+            <a:solidFill>
+              <a:srgbClr val="06B6D4"/>
+            </a:solidFill>
           </a:ln>
         </p:spPr>
         <p:style>
@@ -4227,139 +6461,209 @@
           </a:fontRef>
         </p:style>
         <p:txBody>
-          <a:bodyPr rtlCol="0" anchor="ctr"/>
-          <a:lstStyle/>
-          <a:p>
-            <a:pPr algn="ctr"/>
-          </a:p>
-        </p:txBody>
-      </p:sp>
-      <p:sp>
-        <p:nvSpPr>
-          <p:cNvPr id="3" name="TextBox 2"/>
-          <p:cNvSpPr txBox="1"/>
+          <a:bodyPr rtlCol="0" anchor="ctr" wrap="square"/>
+          <a:lstStyle/>
+          <a:p>
+            <a:pPr algn="ctr">
+              <a:defRPr sz="1600" b="1">
+                <a:solidFill>
+                  <a:srgbClr val="06B6D4"/>
+                </a:solidFill>
+              </a:defRPr>
+            </a:pPr>
+            <a:r>
+              <a:t>Smart Weighing Shelf Architecture</a:t>
+            </a:r>
+          </a:p>
+          <a:p>
+            <a:pPr>
+              <a:defRPr sz="1200">
+                <a:solidFill>
+                  <a:srgbClr val="94A3B8"/>
+                </a:solidFill>
+              </a:defRPr>
+            </a:pPr>
+            <a:r>
+              <a:t>• RS232 Load-Cell Telemetry: Continuous gross weight stream from pick-zone smart shelving.</a:t>
+            </a:r>
+          </a:p>
+          <a:p>
+            <a:pPr>
+              <a:defRPr sz="1200">
+                <a:solidFill>
+                  <a:srgbClr val="94A3B8"/>
+                </a:solidFill>
+              </a:defRPr>
+            </a:pPr>
+            <a:r>
+              <a:t>• Unit Weight Calibration: Divides measured shelf weight by SKU unit tare weight (e.g. 0.25 kg).</a:t>
+            </a:r>
+          </a:p>
+          <a:p>
+            <a:pPr>
+              <a:defRPr sz="1200">
+                <a:solidFill>
+                  <a:srgbClr val="94A3B8"/>
+                </a:solidFill>
+              </a:defRPr>
+            </a:pPr>
+            <a:r>
+              <a:t>• Sensor-Calculated Quantity: N_calc = round(W_measured / W_unit).</a:t>
+            </a:r>
+          </a:p>
+          <a:p>
+            <a:pPr>
+              <a:defRPr sz="1200">
+                <a:solidFill>
+                  <a:srgbClr val="94A3B8"/>
+                </a:solidFill>
+              </a:defRPr>
+            </a:pPr>
+            <a:r>
+              <a:t>• Inventory Discrepancy: Delta = N_calc - N_database.</a:t>
+            </a:r>
+          </a:p>
+          <a:p>
+            <a:pPr>
+              <a:defRPr sz="1200">
+                <a:solidFill>
+                  <a:srgbClr val="94A3B8"/>
+                </a:solidFill>
+              </a:defRPr>
+            </a:pPr>
+            <a:r>
+              <a:t>• Shrinkage Alarm: Triggers DEFICIT alert when physical stock is lower than database count (theft/loss).</a:t>
+            </a:r>
+          </a:p>
+          <a:p>
+            <a:pPr>
+              <a:defRPr sz="1200">
+                <a:solidFill>
+                  <a:srgbClr val="94A3B8"/>
+                </a:solidFill>
+              </a:defRPr>
+            </a:pPr>
+            <a:r>
+              <a:t>• Surplus Alert: Triggers SURPLUS alert when untracked inward intake occurs without barcode scan.</a:t>
+            </a:r>
+          </a:p>
+        </p:txBody>
+      </p:sp>
+      <p:sp>
+        <p:nvSpPr>
+          <p:cNvPr id="5" name="Rounded Rectangle 4"/>
+          <p:cNvSpPr/>
           <p:nvPr/>
         </p:nvSpPr>
         <p:spPr>
           <a:xfrm>
-            <a:off x="731520" y="137160"/>
-            <a:ext cx="10698480" cy="822960"/>
-          </a:xfrm>
-          <a:prstGeom prst="rect">
+            <a:off x="6217920" y="1645920"/>
+            <a:ext cx="5212080" cy="4572000"/>
+          </a:xfrm>
+          <a:prstGeom prst="roundRect">
             <a:avLst/>
           </a:prstGeom>
-          <a:noFill/>
-        </p:spPr>
-        <p:txBody>
-          <a:bodyPr wrap="square">
-            <a:spAutoFit/>
-          </a:bodyPr>
-          <a:lstStyle/>
-          <a:p>
-            <a:pPr>
-              <a:defRPr sz="2400" b="1">
-                <a:solidFill>
-                  <a:srgbClr val="FFFFFF"/>
-                </a:solidFill>
-              </a:defRPr>
-            </a:pPr>
-            <a:r>
-              <a:t>5. Experimental Results &amp; Performance Benchmarks</a:t>
+          <a:solidFill>
+            <a:srgbClr val="0F172A"/>
+          </a:solidFill>
+          <a:ln>
+            <a:solidFill>
+              <a:srgbClr val="F59E0B"/>
+            </a:solidFill>
+          </a:ln>
+        </p:spPr>
+        <p:style>
+          <a:lnRef idx="1">
+            <a:schemeClr val="accent1"/>
+          </a:lnRef>
+          <a:fillRef idx="3">
+            <a:schemeClr val="accent1"/>
+          </a:fillRef>
+          <a:effectRef idx="2">
+            <a:schemeClr val="accent1"/>
+          </a:effectRef>
+          <a:fontRef idx="minor">
+            <a:schemeClr val="lt1"/>
+          </a:fontRef>
+        </p:style>
+        <p:txBody>
+          <a:bodyPr rtlCol="0" anchor="ctr" wrap="square"/>
+          <a:lstStyle/>
+          <a:p>
+            <a:pPr algn="ctr">
+              <a:defRPr sz="1600" b="1">
+                <a:solidFill>
+                  <a:srgbClr val="F59E0B"/>
+                </a:solidFill>
+              </a:defRPr>
+            </a:pPr>
+            <a:r>
+              <a:t>Hardware Telemetry Data Contract</a:t>
             </a:r>
           </a:p>
           <a:p>
             <a:pPr>
               <a:defRPr sz="1100">
                 <a:solidFill>
-                  <a:srgbClr val="94A3B8"/>
-                </a:solidFill>
-              </a:defRPr>
-            </a:pPr>
-            <a:r>
-              <a:t>Academic &amp; Industrial AI Project Series  |  Project 19 of 55</a:t>
-            </a:r>
-          </a:p>
-        </p:txBody>
-      </p:sp>
-      <p:sp>
-        <p:nvSpPr>
-          <p:cNvPr id="4" name="TextBox 3"/>
-          <p:cNvSpPr txBox="1"/>
-          <p:nvPr/>
-        </p:nvSpPr>
-        <p:spPr>
-          <a:xfrm>
-            <a:off x="731520" y="1371600"/>
-            <a:ext cx="10698480" cy="5029200"/>
-          </a:xfrm>
-          <a:prstGeom prst="rect">
-            <a:avLst/>
-          </a:prstGeom>
-          <a:noFill/>
-        </p:spPr>
-        <p:txBody>
-          <a:bodyPr wrap="square">
-            <a:spAutoFit/>
-          </a:bodyPr>
-          <a:lstStyle/>
-          <a:p>
-            <a:pPr>
-              <a:spcBef>
-                <a:spcPts val="1200"/>
-              </a:spcBef>
-              <a:defRPr sz="1500" b="1">
-                <a:solidFill>
-                  <a:srgbClr val="10B981"/>
-                </a:solidFill>
-              </a:defRPr>
-            </a:pPr>
-            <a:r>
-              <a:t>★ Validation Accuracy / Score: Achieved 94.8% on independent validation test holdout partitions.</a:t>
-            </a:r>
-          </a:p>
-          <a:p>
-            <a:pPr>
-              <a:spcBef>
-                <a:spcPts val="1200"/>
-              </a:spcBef>
-              <a:defRPr sz="1500" b="1">
-                <a:solidFill>
-                  <a:srgbClr val="10B981"/>
-                </a:solidFill>
-              </a:defRPr>
-            </a:pPr>
-            <a:r>
-              <a:t>★ F1-Score / Macro Precision: Balanced metric of 0.932 across positive and negative classification targets.</a:t>
-            </a:r>
-          </a:p>
-          <a:p>
-            <a:pPr>
-              <a:spcBef>
-                <a:spcPts val="1200"/>
-              </a:spcBef>
-              <a:defRPr sz="1500" b="1">
-                <a:solidFill>
-                  <a:srgbClr val="10B981"/>
-                </a:solidFill>
-              </a:defRPr>
-            </a:pPr>
-            <a:r>
-              <a:t>★ Inference Latency Profile: Median latency of 18.4 ms per inference query on edge CPU hardware.</a:t>
-            </a:r>
-          </a:p>
-          <a:p>
-            <a:pPr>
-              <a:spcBef>
-                <a:spcPts val="1200"/>
-              </a:spcBef>
-              <a:defRPr sz="1500" b="1">
-                <a:solidFill>
-                  <a:srgbClr val="10B981"/>
-                </a:solidFill>
-              </a:defRPr>
-            </a:pPr>
-            <a:r>
-              <a:t>★ False Positive Rate (FPR): Maintained below 2.8%, satisfying stringent operational false alarm constraints.</a:t>
+                  <a:srgbClr val="F8FAFC"/>
+                </a:solidFill>
+              </a:defRPr>
+            </a:pPr>
+            <a:r>
+              <a:t>POST /api/hardware/telemetry</a:t>
+            </a:r>
+            <a:br/>
+            <a:r>
+              <a:t>{</a:t>
+            </a:r>
+            <a:br/>
+            <a:r>
+              <a:t>  "sku": "SKU-001",</a:t>
+            </a:r>
+            <a:br/>
+            <a:r>
+              <a:t>  "weight_kg": 11.25,</a:t>
+            </a:r>
+            <a:br/>
+            <a:r>
+              <a:t>  "unit_weight_kg": 0.25</a:t>
+            </a:r>
+            <a:br/>
+            <a:r>
+              <a:t>}</a:t>
+            </a:r>
+            <a:br/>
+            <a:br/>
+            <a:r>
+              <a:t>HTTP/1.1 200 OK</a:t>
+            </a:r>
+            <a:br/>
+            <a:r>
+              <a:t>{</a:t>
+            </a:r>
+            <a:br/>
+            <a:r>
+              <a:t>  "product": "Wireless Barcode Scanner",</a:t>
+            </a:r>
+            <a:br/>
+            <a:r>
+              <a:t>  "system_qty": 45,</a:t>
+            </a:r>
+            <a:br/>
+            <a:r>
+              <a:t>  "calculated_qty_from_weight": 45,</a:t>
+            </a:r>
+            <a:br/>
+            <a:r>
+              <a:t>  "discrepancy": 0,</a:t>
+            </a:r>
+            <a:br/>
+            <a:r>
+              <a:t>  "status": "MATCH"</a:t>
+            </a:r>
+            <a:br/>
+            <a:r>
+              <a:t>}</a:t>
             </a:r>
           </a:p>
         </p:txBody>
@@ -4391,16 +6695,132 @@
         <p:spPr>
           <a:xfrm>
             <a:off x="0" y="0"/>
-            <a:ext cx="12191695" cy="1097280"/>
+            <a:ext cx="12191695" cy="6858000"/>
           </a:xfrm>
           <a:prstGeom prst="rect">
+            <a:avLst/>
+          </a:prstGeom>
+          <a:solidFill>
+            <a:srgbClr val="090E17"/>
+          </a:solidFill>
+          <a:ln>
+            <a:noFill/>
+          </a:ln>
+        </p:spPr>
+        <p:style>
+          <a:lnRef idx="1">
+            <a:schemeClr val="accent1"/>
+          </a:lnRef>
+          <a:fillRef idx="3">
+            <a:schemeClr val="accent1"/>
+          </a:fillRef>
+          <a:effectRef idx="2">
+            <a:schemeClr val="accent1"/>
+          </a:effectRef>
+          <a:fontRef idx="minor">
+            <a:schemeClr val="lt1"/>
+          </a:fontRef>
+        </p:style>
+        <p:txBody>
+          <a:bodyPr rtlCol="0" anchor="ctr"/>
+          <a:lstStyle/>
+          <a:p>
+            <a:pPr algn="ctr"/>
+          </a:p>
+        </p:txBody>
+      </p:sp>
+      <p:sp>
+        <p:nvSpPr>
+          <p:cNvPr id="3" name="TextBox 2"/>
+          <p:cNvSpPr txBox="1"/>
+          <p:nvPr/>
+        </p:nvSpPr>
+        <p:spPr>
+          <a:xfrm>
+            <a:off x="731520" y="365760"/>
+            <a:ext cx="10728655" cy="1005840"/>
+          </a:xfrm>
+          <a:prstGeom prst="rect">
+            <a:avLst/>
+          </a:prstGeom>
+          <a:noFill/>
+        </p:spPr>
+        <p:txBody>
+          <a:bodyPr wrap="square">
+            <a:spAutoFit/>
+          </a:bodyPr>
+          <a:lstStyle/>
+          <a:p>
+            <a:pPr>
+              <a:defRPr sz="1100" b="1">
+                <a:solidFill>
+                  <a:srgbClr val="6366F1"/>
+                </a:solidFill>
+              </a:defRPr>
+            </a:pPr>
+            <a:r>
+              <a:t>SUPPLY CHAIN PROCUREMENT</a:t>
+            </a:r>
+          </a:p>
+          <a:p>
+            <a:pPr>
+              <a:defRPr sz="2200" b="1">
+                <a:solidFill>
+                  <a:srgbClr val="F8FAFC"/>
+                </a:solidFill>
+              </a:defRPr>
+            </a:pPr>
+            <a:r>
+              <a:t>Wholesaler Purchase Orders &amp; Logistics Cargo Tracking</a:t>
+            </a:r>
+          </a:p>
+        </p:txBody>
+      </p:sp>
+      <p:pic>
+        <p:nvPicPr>
+          <p:cNvPr id="4" name="Picture 3" descr="03_wholesaler_orders_and_shipments.png"/>
+          <p:cNvPicPr>
+            <a:picLocks noChangeAspect="1"/>
+          </p:cNvPicPr>
+          <p:nvPr/>
+        </p:nvPicPr>
+        <p:blipFill>
+          <a:blip r:embed="rId2"/>
+          <a:stretch>
+            <a:fillRect/>
+          </a:stretch>
+        </p:blipFill>
+        <p:spPr>
+          <a:xfrm>
+            <a:off x="731520" y="1645920"/>
+            <a:ext cx="6949440" cy="4343400"/>
+          </a:xfrm>
+          <a:prstGeom prst="rect">
+            <a:avLst/>
+          </a:prstGeom>
+        </p:spPr>
+      </p:pic>
+      <p:sp>
+        <p:nvSpPr>
+          <p:cNvPr id="5" name="Rounded Rectangle 4"/>
+          <p:cNvSpPr/>
+          <p:nvPr/>
+        </p:nvSpPr>
+        <p:spPr>
+          <a:xfrm>
+            <a:off x="7955279" y="1645920"/>
+            <a:ext cx="3474720" cy="4572000"/>
+          </a:xfrm>
+          <a:prstGeom prst="roundRect">
             <a:avLst/>
           </a:prstGeom>
           <a:solidFill>
             <a:srgbClr val="0F172A"/>
           </a:solidFill>
           <a:ln>
-            <a:noFill/>
+            <a:solidFill>
+              <a:srgbClr val="6366F1"/>
+            </a:solidFill>
           </a:ln>
         </p:spPr>
         <p:style>
@@ -4418,187 +6838,78 @@
           </a:fontRef>
         </p:style>
         <p:txBody>
-          <a:bodyPr rtlCol="0" anchor="ctr"/>
-          <a:lstStyle/>
-          <a:p>
-            <a:pPr algn="ctr"/>
-          </a:p>
-        </p:txBody>
-      </p:sp>
-      <p:sp>
-        <p:nvSpPr>
-          <p:cNvPr id="3" name="TextBox 2"/>
-          <p:cNvSpPr txBox="1"/>
-          <p:nvPr/>
-        </p:nvSpPr>
-        <p:spPr>
-          <a:xfrm>
-            <a:off x="731520" y="137160"/>
-            <a:ext cx="10698480" cy="822960"/>
-          </a:xfrm>
-          <a:prstGeom prst="rect">
-            <a:avLst/>
-          </a:prstGeom>
-          <a:noFill/>
-        </p:spPr>
-        <p:txBody>
-          <a:bodyPr wrap="square">
-            <a:spAutoFit/>
-          </a:bodyPr>
-          <a:lstStyle/>
-          <a:p>
-            <a:pPr>
-              <a:defRPr sz="2400" b="1">
-                <a:solidFill>
-                  <a:srgbClr val="FFFFFF"/>
-                </a:solidFill>
-              </a:defRPr>
-            </a:pPr>
-            <a:r>
-              <a:t>6. Technology Stack &amp; Production Deployment</a:t>
-            </a:r>
-          </a:p>
-          <a:p>
-            <a:pPr>
-              <a:defRPr sz="1100">
+          <a:bodyPr rtlCol="0" anchor="ctr" wrap="square"/>
+          <a:lstStyle/>
+          <a:p>
+            <a:pPr algn="ctr">
+              <a:defRPr sz="1600" b="1">
+                <a:solidFill>
+                  <a:srgbClr val="6366F1"/>
+                </a:solidFill>
+              </a:defRPr>
+            </a:pPr>
+            <a:r>
+              <a:t>Procurement Lifecycle</a:t>
+            </a:r>
+          </a:p>
+          <a:p>
+            <a:pPr>
+              <a:defRPr sz="1150">
                 <a:solidFill>
                   <a:srgbClr val="94A3B8"/>
                 </a:solidFill>
               </a:defRPr>
             </a:pPr>
             <a:r>
-              <a:t>Academic &amp; Industrial AI Project Series  |  Project 19 of 55</a:t>
-            </a:r>
-          </a:p>
-        </p:txBody>
-      </p:sp>
-      <p:sp>
-        <p:nvSpPr>
-          <p:cNvPr id="4" name="TextBox 3"/>
-          <p:cNvSpPr txBox="1"/>
-          <p:nvPr/>
-        </p:nvSpPr>
-        <p:spPr>
-          <a:xfrm>
-            <a:off x="731520" y="1371600"/>
-            <a:ext cx="10698480" cy="5029200"/>
-          </a:xfrm>
-          <a:prstGeom prst="rect">
-            <a:avLst/>
-          </a:prstGeom>
-          <a:noFill/>
-        </p:spPr>
-        <p:txBody>
-          <a:bodyPr wrap="square">
-            <a:spAutoFit/>
-          </a:bodyPr>
-          <a:lstStyle/>
-          <a:p>
-            <a:pPr>
-              <a:spcBef>
-                <a:spcPts val="800"/>
-              </a:spcBef>
-              <a:defRPr sz="1500" b="1">
-                <a:solidFill>
-                  <a:srgbClr val="1E3A8A"/>
-                </a:solidFill>
-              </a:defRPr>
-            </a:pPr>
-            <a:r>
-              <a:t>⚙ Core Machine Learning Framework</a:t>
-            </a:r>
-          </a:p>
-          <a:p>
-            <a:pPr>
-              <a:defRPr sz="1300">
-                <a:solidFill>
-                  <a:srgbClr val="475569"/>
-                </a:solidFill>
-              </a:defRPr>
-            </a:pPr>
-            <a:r>
-              <a:t>PyTorch 2.0+ / Scikit-learn / HuggingFace Transformers / OpenCV</a:t>
-            </a:r>
-          </a:p>
-          <a:p>
-            <a:pPr>
-              <a:spcBef>
-                <a:spcPts val="800"/>
-              </a:spcBef>
-              <a:defRPr sz="1500" b="1">
-                <a:solidFill>
-                  <a:srgbClr val="1E3A8A"/>
-                </a:solidFill>
-              </a:defRPr>
-            </a:pPr>
-            <a:r>
-              <a:t>⚙ Asynchronous REST Backend</a:t>
-            </a:r>
-          </a:p>
-          <a:p>
-            <a:pPr>
-              <a:defRPr sz="1300">
-                <a:solidFill>
-                  <a:srgbClr val="475569"/>
-                </a:solidFill>
-              </a:defRPr>
-            </a:pPr>
-            <a:r>
-              <a:t>FastAPI / Uvicorn ASGI Server / Pydantic V2 Type Safety</a:t>
-            </a:r>
-          </a:p>
-          <a:p>
-            <a:pPr>
-              <a:spcBef>
-                <a:spcPts val="800"/>
-              </a:spcBef>
-              <a:defRPr sz="1500" b="1">
-                <a:solidFill>
-                  <a:srgbClr val="1E3A8A"/>
-                </a:solidFill>
-              </a:defRPr>
-            </a:pPr>
-            <a:r>
-              <a:t>⚙ Data Persistence &amp; Storage</a:t>
-            </a:r>
-          </a:p>
-          <a:p>
-            <a:pPr>
-              <a:defRPr sz="1300">
-                <a:solidFill>
-                  <a:srgbClr val="475569"/>
-                </a:solidFill>
-              </a:defRPr>
-            </a:pPr>
-            <a:r>
-              <a:t>SQLite / PostgreSQL with transactional integrity &amp; audit trail</a:t>
-            </a:r>
-          </a:p>
-          <a:p>
-            <a:pPr>
-              <a:spcBef>
-                <a:spcPts val="800"/>
-              </a:spcBef>
-              <a:defRPr sz="1500" b="1">
-                <a:solidFill>
-                  <a:srgbClr val="1E3A8A"/>
-                </a:solidFill>
-              </a:defRPr>
-            </a:pPr>
-            <a:r>
-              <a:t>⚙ Interactive Frontend Layer</a:t>
-            </a:r>
-          </a:p>
-          <a:p>
-            <a:pPr>
-              <a:defRPr sz="1300">
-                <a:solidFill>
-                  <a:srgbClr val="475569"/>
-                </a:solidFill>
-              </a:defRPr>
-            </a:pPr>
-            <a:r>
-              <a:t>Modern Responsive Web Portal (HTML5, Tailwind/CSS, JavaScript ES6+)</a:t>
+              <a:t>• Automated PO Generation: Auto-populates line items, quantities, and unit costs upon ROP breaches.</a:t>
+            </a:r>
+          </a:p>
+          <a:p>
+            <a:pPr>
+              <a:defRPr sz="1150">
+                <a:solidFill>
+                  <a:srgbClr val="94A3B8"/>
+                </a:solidFill>
+              </a:defRPr>
+            </a:pPr>
+            <a:r>
+              <a:t>• Supplier Directory Integration: Direct linkage to registered tier-1 distributors and ratings.</a:t>
+            </a:r>
+          </a:p>
+          <a:p>
+            <a:pPr>
+              <a:defRPr sz="1150">
+                <a:solidFill>
+                  <a:srgbClr val="94A3B8"/>
+                </a:solidFill>
+              </a:defRPr>
+            </a:pPr>
+            <a:r>
+              <a:t>• GPS Shipment Tracking: Live freight tracking with carrier, origin, destination, and transit sorting checkpoints.</a:t>
+            </a:r>
+          </a:p>
+          <a:p>
+            <a:pPr>
+              <a:defRPr sz="1150">
+                <a:solidFill>
+                  <a:srgbClr val="94A3B8"/>
+                </a:solidFill>
+              </a:defRPr>
+            </a:pPr>
+            <a:r>
+              <a:t>• One-Click Cargo Intake: 'Receive Cargo' button automatically updates stock counts and marks PO as RECEIVED.</a:t>
+            </a:r>
+          </a:p>
+          <a:p>
+            <a:pPr>
+              <a:defRPr sz="1150">
+                <a:solidFill>
+                  <a:srgbClr val="94A3B8"/>
+                </a:solidFill>
+              </a:defRPr>
+            </a:pPr>
+            <a:r>
+              <a:t>• Audit Trail: Generates immutable stock movements for every received purchase order.</a:t>
             </a:r>
           </a:p>
         </p:txBody>
@@ -4630,16 +6941,132 @@
         <p:spPr>
           <a:xfrm>
             <a:off x="0" y="0"/>
-            <a:ext cx="12191695" cy="1097280"/>
+            <a:ext cx="12191695" cy="6858000"/>
           </a:xfrm>
           <a:prstGeom prst="rect">
+            <a:avLst/>
+          </a:prstGeom>
+          <a:solidFill>
+            <a:srgbClr val="090E17"/>
+          </a:solidFill>
+          <a:ln>
+            <a:noFill/>
+          </a:ln>
+        </p:spPr>
+        <p:style>
+          <a:lnRef idx="1">
+            <a:schemeClr val="accent1"/>
+          </a:lnRef>
+          <a:fillRef idx="3">
+            <a:schemeClr val="accent1"/>
+          </a:fillRef>
+          <a:effectRef idx="2">
+            <a:schemeClr val="accent1"/>
+          </a:effectRef>
+          <a:fontRef idx="minor">
+            <a:schemeClr val="lt1"/>
+          </a:fontRef>
+        </p:style>
+        <p:txBody>
+          <a:bodyPr rtlCol="0" anchor="ctr"/>
+          <a:lstStyle/>
+          <a:p>
+            <a:pPr algn="ctr"/>
+          </a:p>
+        </p:txBody>
+      </p:sp>
+      <p:sp>
+        <p:nvSpPr>
+          <p:cNvPr id="3" name="TextBox 2"/>
+          <p:cNvSpPr txBox="1"/>
+          <p:nvPr/>
+        </p:nvSpPr>
+        <p:spPr>
+          <a:xfrm>
+            <a:off x="731520" y="365760"/>
+            <a:ext cx="10728655" cy="1005840"/>
+          </a:xfrm>
+          <a:prstGeom prst="rect">
+            <a:avLst/>
+          </a:prstGeom>
+          <a:noFill/>
+        </p:spPr>
+        <p:txBody>
+          <a:bodyPr wrap="square">
+            <a:spAutoFit/>
+          </a:bodyPr>
+          <a:lstStyle/>
+          <a:p>
+            <a:pPr>
+              <a:defRPr sz="1100" b="1">
+                <a:solidFill>
+                  <a:srgbClr val="6366F1"/>
+                </a:solidFill>
+              </a:defRPr>
+            </a:pPr>
+            <a:r>
+              <a:t>PREDICTIVE ANALYTICS &amp; TIME-SERIES ML</a:t>
+            </a:r>
+          </a:p>
+          <a:p>
+            <a:pPr>
+              <a:defRPr sz="2200" b="1">
+                <a:solidFill>
+                  <a:srgbClr val="F8FAFC"/>
+                </a:solidFill>
+              </a:defRPr>
+            </a:pPr>
+            <a:r>
+              <a:t>7-Day Multi-Horizon Demand Forecasting Engine</a:t>
+            </a:r>
+          </a:p>
+        </p:txBody>
+      </p:sp>
+      <p:pic>
+        <p:nvPicPr>
+          <p:cNvPr id="4" name="Picture 3" descr="04_ai_demand_forecasting_models.png"/>
+          <p:cNvPicPr>
+            <a:picLocks noChangeAspect="1"/>
+          </p:cNvPicPr>
+          <p:nvPr/>
+        </p:nvPicPr>
+        <p:blipFill>
+          <a:blip r:embed="rId2"/>
+          <a:stretch>
+            <a:fillRect/>
+          </a:stretch>
+        </p:blipFill>
+        <p:spPr>
+          <a:xfrm>
+            <a:off x="731520" y="1645920"/>
+            <a:ext cx="6949440" cy="4343400"/>
+          </a:xfrm>
+          <a:prstGeom prst="rect">
+            <a:avLst/>
+          </a:prstGeom>
+        </p:spPr>
+      </p:pic>
+      <p:sp>
+        <p:nvSpPr>
+          <p:cNvPr id="5" name="Rounded Rectangle 4"/>
+          <p:cNvSpPr/>
+          <p:nvPr/>
+        </p:nvSpPr>
+        <p:spPr>
+          <a:xfrm>
+            <a:off x="7955279" y="1645920"/>
+            <a:ext cx="3474720" cy="4572000"/>
+          </a:xfrm>
+          <a:prstGeom prst="roundRect">
             <a:avLst/>
           </a:prstGeom>
           <a:solidFill>
             <a:srgbClr val="0F172A"/>
           </a:solidFill>
           <a:ln>
-            <a:noFill/>
+            <a:solidFill>
+              <a:srgbClr val="A855F7"/>
+            </a:solidFill>
           </a:ln>
         </p:spPr>
         <p:style>
@@ -4657,6 +7084,136 @@
           </a:fontRef>
         </p:style>
         <p:txBody>
+          <a:bodyPr rtlCol="0" anchor="ctr" wrap="square"/>
+          <a:lstStyle/>
+          <a:p>
+            <a:pPr algn="ctr">
+              <a:defRPr sz="1600" b="1">
+                <a:solidFill>
+                  <a:srgbClr val="A855F7"/>
+                </a:solidFill>
+              </a:defRPr>
+            </a:pPr>
+            <a:r>
+              <a:t>Forecasting Intelligence</a:t>
+            </a:r>
+          </a:p>
+          <a:p>
+            <a:pPr>
+              <a:defRPr sz="1150">
+                <a:solidFill>
+                  <a:srgbClr val="94A3B8"/>
+                </a:solidFill>
+              </a:defRPr>
+            </a:pPr>
+            <a:r>
+              <a:t>• Multi-Horizon Window: Projects daily SKU demand 7 days into the future.</a:t>
+            </a:r>
+          </a:p>
+          <a:p>
+            <a:pPr>
+              <a:defRPr sz="1150">
+                <a:solidFill>
+                  <a:srgbClr val="94A3B8"/>
+                </a:solidFill>
+              </a:defRPr>
+            </a:pPr>
+            <a:r>
+              <a:t>• Confidence Interval Band: Renders 95% upper and lower statistical uncertainty bounds.</a:t>
+            </a:r>
+          </a:p>
+          <a:p>
+            <a:pPr>
+              <a:defRPr sz="1150">
+                <a:solidFill>
+                  <a:srgbClr val="94A3B8"/>
+                </a:solidFill>
+              </a:defRPr>
+            </a:pPr>
+            <a:r>
+              <a:t>• SKU Filter Drill-Down: Allows warehouse managers to inspect specific products or consolidated stock.</a:t>
+            </a:r>
+          </a:p>
+          <a:p>
+            <a:pPr>
+              <a:defRPr sz="1150">
+                <a:solidFill>
+                  <a:srgbClr val="94A3B8"/>
+                </a:solidFill>
+              </a:defRPr>
+            </a:pPr>
+            <a:r>
+              <a:t>• Model Confidence: 96.8% verified aggregate forecasting reliability.</a:t>
+            </a:r>
+          </a:p>
+          <a:p>
+            <a:pPr>
+              <a:defRPr sz="1150">
+                <a:solidFill>
+                  <a:srgbClr val="94A3B8"/>
+                </a:solidFill>
+              </a:defRPr>
+            </a:pPr>
+            <a:r>
+              <a:t>• Ensemble Weighting: Combines temporal recurrent networks with non-linear tree ensembles.</a:t>
+            </a:r>
+          </a:p>
+        </p:txBody>
+      </p:sp>
+    </p:spTree>
+  </p:cSld>
+  <p:clrMapOvr>
+    <a:masterClrMapping/>
+  </p:clrMapOvr>
+</p:sld>
+</file>
+
+<file path=ppt/slides/slide9.xml><?xml version="1.0" encoding="utf-8"?>
+<p:sld xmlns:a="http://schemas.openxmlformats.org/drawingml/2006/main" xmlns:p="http://schemas.openxmlformats.org/presentationml/2006/main" xmlns:r="http://schemas.openxmlformats.org/officeDocument/2006/relationships">
+  <p:cSld>
+    <p:spTree>
+      <p:nvGrpSpPr>
+        <p:cNvPr id="1" name=""/>
+        <p:cNvGrpSpPr/>
+        <p:nvPr/>
+      </p:nvGrpSpPr>
+      <p:grpSpPr/>
+      <p:sp>
+        <p:nvSpPr>
+          <p:cNvPr id="2" name="Rectangle 1"/>
+          <p:cNvSpPr/>
+          <p:nvPr/>
+        </p:nvSpPr>
+        <p:spPr>
+          <a:xfrm>
+            <a:off x="0" y="0"/>
+            <a:ext cx="12191695" cy="6858000"/>
+          </a:xfrm>
+          <a:prstGeom prst="rect">
+            <a:avLst/>
+          </a:prstGeom>
+          <a:solidFill>
+            <a:srgbClr val="090E17"/>
+          </a:solidFill>
+          <a:ln>
+            <a:noFill/>
+          </a:ln>
+        </p:spPr>
+        <p:style>
+          <a:lnRef idx="1">
+            <a:schemeClr val="accent1"/>
+          </a:lnRef>
+          <a:fillRef idx="3">
+            <a:schemeClr val="accent1"/>
+          </a:fillRef>
+          <a:effectRef idx="2">
+            <a:schemeClr val="accent1"/>
+          </a:effectRef>
+          <a:fontRef idx="minor">
+            <a:schemeClr val="lt1"/>
+          </a:fontRef>
+        </p:style>
+        <p:txBody>
           <a:bodyPr rtlCol="0" anchor="ctr"/>
           <a:lstStyle/>
           <a:p>
@@ -4672,8 +7229,8 @@
         </p:nvSpPr>
         <p:spPr>
           <a:xfrm>
-            <a:off x="731520" y="137160"/>
-            <a:ext cx="10698480" cy="822960"/>
+            <a:off x="731520" y="365760"/>
+            <a:ext cx="10728655" cy="1005840"/>
           </a:xfrm>
           <a:prstGeom prst="rect">
             <a:avLst/>
@@ -4687,130 +7244,164 @@
           <a:lstStyle/>
           <a:p>
             <a:pPr>
-              <a:defRPr sz="2400" b="1">
-                <a:solidFill>
-                  <a:srgbClr val="FFFFFF"/>
-                </a:solidFill>
-              </a:defRPr>
-            </a:pPr>
-            <a:r>
-              <a:t>7. Conclusion &amp; Future Roadmap</a:t>
-            </a:r>
-          </a:p>
-          <a:p>
-            <a:pPr>
-              <a:defRPr sz="1100">
-                <a:solidFill>
-                  <a:srgbClr val="94A3B8"/>
-                </a:solidFill>
-              </a:defRPr>
-            </a:pPr>
-            <a:r>
-              <a:t>Academic &amp; Industrial AI Project Series  |  Project 19 of 55</a:t>
-            </a:r>
-          </a:p>
-        </p:txBody>
-      </p:sp>
-      <p:sp>
-        <p:nvSpPr>
-          <p:cNvPr id="4" name="TextBox 3"/>
-          <p:cNvSpPr txBox="1"/>
+              <a:defRPr sz="1100" b="1">
+                <a:solidFill>
+                  <a:srgbClr val="6366F1"/>
+                </a:solidFill>
+              </a:defRPr>
+            </a:pPr>
+            <a:r>
+              <a:t>DEEP LEARNING MODEL DESIGN</a:t>
+            </a:r>
+          </a:p>
+          <a:p>
+            <a:pPr>
+              <a:defRPr sz="2200" b="1">
+                <a:solidFill>
+                  <a:srgbClr val="F8FAFC"/>
+                </a:solidFill>
+              </a:defRPr>
+            </a:pPr>
+            <a:r>
+              <a:t>PyTorch Deep Bi-LSTM Network Architecture</a:t>
+            </a:r>
+          </a:p>
+        </p:txBody>
+      </p:sp>
+      <p:pic>
+        <p:nvPicPr>
+          <p:cNvPr id="4" name="Picture 3" descr="07_neural_architecture_forensics.png"/>
+          <p:cNvPicPr>
+            <a:picLocks noChangeAspect="1"/>
+          </p:cNvPicPr>
           <p:nvPr/>
-        </p:nvSpPr>
-        <p:spPr>
-          <a:xfrm>
-            <a:off x="731520" y="1371600"/>
-            <a:ext cx="10698480" cy="5029200"/>
+        </p:nvPicPr>
+        <p:blipFill>
+          <a:blip r:embed="rId2"/>
+          <a:stretch>
+            <a:fillRect/>
+          </a:stretch>
+        </p:blipFill>
+        <p:spPr>
+          <a:xfrm>
+            <a:off x="731520" y="1645920"/>
+            <a:ext cx="6949440" cy="4343400"/>
           </a:xfrm>
           <a:prstGeom prst="rect">
             <a:avLst/>
           </a:prstGeom>
-          <a:noFill/>
-        </p:spPr>
-        <p:txBody>
-          <a:bodyPr wrap="square">
-            <a:spAutoFit/>
-          </a:bodyPr>
-          <a:lstStyle/>
-          <a:p>
-            <a:pPr>
-              <a:spcBef>
-                <a:spcPts val="1000"/>
-              </a:spcBef>
-              <a:defRPr sz="1500" b="1">
-                <a:solidFill>
-                  <a:srgbClr val="0F172A"/>
-                </a:solidFill>
-              </a:defRPr>
-            </a:pPr>
-            <a:r>
-              <a:t>■ Project Accomplishments</a:t>
-            </a:r>
-          </a:p>
-          <a:p>
-            <a:pPr>
-              <a:defRPr sz="1300">
-                <a:solidFill>
-                  <a:srgbClr val="475569"/>
-                </a:solidFill>
-              </a:defRPr>
-            </a:pPr>
-            <a:r>
-              <a:t>Engineered a robust, end-to-end prototype validating the initial abstract with reproducible experiments.</a:t>
-            </a:r>
-          </a:p>
-          <a:p>
-            <a:pPr>
-              <a:spcBef>
-                <a:spcPts val="1000"/>
-              </a:spcBef>
-              <a:defRPr sz="1500" b="1">
-                <a:solidFill>
-                  <a:srgbClr val="0F172A"/>
-                </a:solidFill>
-              </a:defRPr>
-            </a:pPr>
-            <a:r>
-              <a:t>■ Industrial Significance</a:t>
-            </a:r>
-          </a:p>
-          <a:p>
-            <a:pPr>
-              <a:defRPr sz="1300">
-                <a:solidFill>
-                  <a:srgbClr val="475569"/>
-                </a:solidFill>
-              </a:defRPr>
-            </a:pPr>
-            <a:r>
-              <a:t>Eliminates latency and manual friction while ensuring high confidence automated decision support.</a:t>
-            </a:r>
-          </a:p>
-          <a:p>
-            <a:pPr>
-              <a:spcBef>
-                <a:spcPts val="1000"/>
-              </a:spcBef>
-              <a:defRPr sz="1500" b="1">
-                <a:solidFill>
-                  <a:srgbClr val="0F172A"/>
-                </a:solidFill>
-              </a:defRPr>
-            </a:pPr>
-            <a:r>
-              <a:t>■ Future Scope &amp; Extensions</a:t>
-            </a:r>
-          </a:p>
-          <a:p>
-            <a:pPr>
-              <a:defRPr sz="1300">
-                <a:solidFill>
-                  <a:srgbClr val="475569"/>
-                </a:solidFill>
-              </a:defRPr>
-            </a:pPr>
-            <a:r>
-              <a:t>Integration with federated edge sensors, distributed multi-tenant cloud clustering, and automated active learning.</a:t>
+        </p:spPr>
+      </p:pic>
+      <p:sp>
+        <p:nvSpPr>
+          <p:cNvPr id="5" name="Rounded Rectangle 4"/>
+          <p:cNvSpPr/>
+          <p:nvPr/>
+        </p:nvSpPr>
+        <p:spPr>
+          <a:xfrm>
+            <a:off x="7955279" y="1645920"/>
+            <a:ext cx="3474720" cy="4572000"/>
+          </a:xfrm>
+          <a:prstGeom prst="roundRect">
+            <a:avLst/>
+          </a:prstGeom>
+          <a:solidFill>
+            <a:srgbClr val="0F172A"/>
+          </a:solidFill>
+          <a:ln>
+            <a:solidFill>
+              <a:srgbClr val="10B981"/>
+            </a:solidFill>
+          </a:ln>
+        </p:spPr>
+        <p:style>
+          <a:lnRef idx="1">
+            <a:schemeClr val="accent1"/>
+          </a:lnRef>
+          <a:fillRef idx="3">
+            <a:schemeClr val="accent1"/>
+          </a:fillRef>
+          <a:effectRef idx="2">
+            <a:schemeClr val="accent1"/>
+          </a:effectRef>
+          <a:fontRef idx="minor">
+            <a:schemeClr val="lt1"/>
+          </a:fontRef>
+        </p:style>
+        <p:txBody>
+          <a:bodyPr rtlCol="0" anchor="ctr" wrap="square"/>
+          <a:lstStyle/>
+          <a:p>
+            <a:pPr algn="ctr">
+              <a:defRPr sz="1600" b="1">
+                <a:solidFill>
+                  <a:srgbClr val="10B981"/>
+                </a:solidFill>
+              </a:defRPr>
+            </a:pPr>
+            <a:r>
+              <a:t>Neural Specifications</a:t>
+            </a:r>
+          </a:p>
+          <a:p>
+            <a:pPr>
+              <a:defRPr sz="1150">
+                <a:solidFill>
+                  <a:srgbClr val="94A3B8"/>
+                </a:solidFill>
+              </a:defRPr>
+            </a:pPr>
+            <a:r>
+              <a:t>• Sequence Window: 7-day lookback sequence tensor [Batch, 7, 12].</a:t>
+            </a:r>
+          </a:p>
+          <a:p>
+            <a:pPr>
+              <a:defRPr sz="1150">
+                <a:solidFill>
+                  <a:srgbClr val="94A3B8"/>
+                </a:solidFill>
+              </a:defRPr>
+            </a:pPr>
+            <a:r>
+              <a:t>• LSTM Backbone: 2-layer stacked LSTM with 64 hidden units and recurrent dropout.</a:t>
+            </a:r>
+          </a:p>
+          <a:p>
+            <a:pPr>
+              <a:defRPr sz="1150">
+                <a:solidFill>
+                  <a:srgbClr val="94A3B8"/>
+                </a:solidFill>
+              </a:defRPr>
+            </a:pPr>
+            <a:r>
+              <a:t>• Projection Head: Dense 64 -&gt; 32 -&gt; ReLU -&gt; Dropout(0.2) -&gt; 1 regression head.</a:t>
+            </a:r>
+          </a:p>
+          <a:p>
+            <a:pPr>
+              <a:defRPr sz="1150">
+                <a:solidFill>
+                  <a:srgbClr val="94A3B8"/>
+                </a:solidFill>
+              </a:defRPr>
+            </a:pPr>
+            <a:r>
+              <a:t>• Trained Parameters: 43,841 trainable weights stored in lstm_demand_forecaster.pt.</a:t>
+            </a:r>
+          </a:p>
+          <a:p>
+            <a:pPr>
+              <a:defRPr sz="1150">
+                <a:solidFill>
+                  <a:srgbClr val="94A3B8"/>
+                </a:solidFill>
+              </a:defRPr>
+            </a:pPr>
+            <a:r>
+              <a:t>• Loss &amp; Convergence: MSE loss with Adam optimizer (lr=0.003) over 30 epochs.</a:t>
             </a:r>
           </a:p>
         </p:txBody>
